--- a/Science_Teesside/Teaching_Packs/BUILD/lessons/W5B/BUILD_Science_Autumn1_W5B_Food_Jobs_Mission.pptx
+++ b/Science_Teesside/Teaching_Packs/BUILD/lessons/W5B/BUILD_Science_Autumn1_W5B_Food_Jobs_Mission.pptx
@@ -2,22 +2,22 @@
 <file path=ppt/presentation.xml><?xml version="1.0" encoding="utf-8"?>
 <p:presentation xmlns:p="http://schemas.openxmlformats.org/presentationml/2006/main">
   <p:sldMasterIdLst>
-    <p:sldMasterId xmlns:r="http://schemas.openxmlformats.org/officeDocument/2006/relationships" id="2147483648" r:id="R4db38c5efeae4912"/>
+    <p:sldMasterId xmlns:r="http://schemas.openxmlformats.org/officeDocument/2006/relationships" id="2147483648" r:id="R898cb57dce9b4844"/>
   </p:sldMasterIdLst>
   <p:notesMasterIdLst>
-    <p:notesMasterId xmlns:r="http://schemas.openxmlformats.org/officeDocument/2006/relationships" r:id="Re1133f0cc6ed4891"/>
+    <p:notesMasterId xmlns:r="http://schemas.openxmlformats.org/officeDocument/2006/relationships" r:id="Rde232ce47a574683"/>
   </p:notesMasterIdLst>
   <p:sldIdLst>
-    <p:sldId xmlns:r="http://schemas.openxmlformats.org/officeDocument/2006/relationships" id="256" r:id="R59929bccbee6492c"/>
-    <p:sldId xmlns:r="http://schemas.openxmlformats.org/officeDocument/2006/relationships" id="257" r:id="R9a7d5412e58d4dee"/>
-    <p:sldId xmlns:r="http://schemas.openxmlformats.org/officeDocument/2006/relationships" id="258" r:id="Re28707f752a844c1"/>
-    <p:sldId xmlns:r="http://schemas.openxmlformats.org/officeDocument/2006/relationships" id="259" r:id="R72d4c452cd0e4f9d"/>
-    <p:sldId xmlns:r="http://schemas.openxmlformats.org/officeDocument/2006/relationships" id="260" r:id="R255370e5fca34acf"/>
-    <p:sldId xmlns:r="http://schemas.openxmlformats.org/officeDocument/2006/relationships" id="261" r:id="R4ef3b2f6521b4a07"/>
-    <p:sldId xmlns:r="http://schemas.openxmlformats.org/officeDocument/2006/relationships" id="262" r:id="R704ae112a4524691"/>
-    <p:sldId xmlns:r="http://schemas.openxmlformats.org/officeDocument/2006/relationships" id="263" r:id="R7ebd2148bdb34f4b"/>
-    <p:sldId xmlns:r="http://schemas.openxmlformats.org/officeDocument/2006/relationships" id="264" r:id="Ra90bdf70a5c846ef"/>
-    <p:sldId xmlns:r="http://schemas.openxmlformats.org/officeDocument/2006/relationships" id="265" r:id="R5c4e999358784636"/>
+    <p:sldId xmlns:r="http://schemas.openxmlformats.org/officeDocument/2006/relationships" id="256" r:id="R9efab3f0f9624d4f"/>
+    <p:sldId xmlns:r="http://schemas.openxmlformats.org/officeDocument/2006/relationships" id="257" r:id="Rf365004441e14161"/>
+    <p:sldId xmlns:r="http://schemas.openxmlformats.org/officeDocument/2006/relationships" id="258" r:id="R779d06d01daa432b"/>
+    <p:sldId xmlns:r="http://schemas.openxmlformats.org/officeDocument/2006/relationships" id="259" r:id="Rfafdc09e0acc46f9"/>
+    <p:sldId xmlns:r="http://schemas.openxmlformats.org/officeDocument/2006/relationships" id="260" r:id="R9721c0c134224319"/>
+    <p:sldId xmlns:r="http://schemas.openxmlformats.org/officeDocument/2006/relationships" id="261" r:id="R0859e1eea94b4657"/>
+    <p:sldId xmlns:r="http://schemas.openxmlformats.org/officeDocument/2006/relationships" id="262" r:id="Ra3cebdf4dc5643e1"/>
+    <p:sldId xmlns:r="http://schemas.openxmlformats.org/officeDocument/2006/relationships" id="263" r:id="Ra37635c5fcca4863"/>
+    <p:sldId xmlns:r="http://schemas.openxmlformats.org/officeDocument/2006/relationships" id="264" r:id="R8249893219aa46df"/>
+    <p:sldId xmlns:r="http://schemas.openxmlformats.org/officeDocument/2006/relationships" id="265" r:id="R2449f0b7c6ce4b4a"/>
   </p:sldIdLst>
   <p:sldSz cx="12192000" cy="6858000"/>
   <p:notesSz cx="6858000" cy="9144000"/>
@@ -499,6 +499,15 @@
               <a:t>[/Sources]</a:t>
             </a:r>
           </a:p>
+          <a:p xmlns:a="http://schemas.openxmlformats.org/drawingml/2006/main">
+            <a:r>
+              <a:t>
+[Sources]
+https://madebymatt.uk/Lessons/Science_Teesside/Teaching_Packs/BUILD/ — original lesson text, timings and teacher notes retained.
+https://madebymatt.uk/Lessons/Science_Teesside/Build/ — existing Made by Matt scientific artwork, where shown.
+[/Sources]</a:t>
+            </a:r>
+          </a:p>
         </p:txBody>
       </p:sp>
       <p:sp>
@@ -614,6 +623,15 @@
               <a:t>[/Sources]</a:t>
             </a:r>
           </a:p>
+          <a:p xmlns:a="http://schemas.openxmlformats.org/drawingml/2006/main">
+            <a:r>
+              <a:t>
+[Sources]
+https://madebymatt.uk/Lessons/Science_Teesside/Teaching_Packs/BUILD/ — original lesson text, timings and teacher notes retained.
+https://madebymatt.uk/Lessons/Science_Teesside/Build/ — existing Made by Matt scientific artwork, where shown.
+[/Sources]</a:t>
+            </a:r>
+          </a:p>
         </p:txBody>
       </p:sp>
       <p:sp>
@@ -729,6 +747,15 @@
               <a:t>[/Sources]</a:t>
             </a:r>
           </a:p>
+          <a:p xmlns:a="http://schemas.openxmlformats.org/drawingml/2006/main">
+            <a:r>
+              <a:t>
+[Sources]
+https://madebymatt.uk/Lessons/Science_Teesside/Teaching_Packs/BUILD/ — original lesson text, timings and teacher notes retained.
+https://madebymatt.uk/Lessons/Science_Teesside/Build/ — existing Made by Matt scientific artwork, where shown.
+[/Sources]</a:t>
+            </a:r>
+          </a:p>
         </p:txBody>
       </p:sp>
       <p:sp>
@@ -844,6 +871,15 @@
               <a:t>[/Sources]</a:t>
             </a:r>
           </a:p>
+          <a:p xmlns:a="http://schemas.openxmlformats.org/drawingml/2006/main">
+            <a:r>
+              <a:t>
+[Sources]
+https://madebymatt.uk/Lessons/Science_Teesside/Teaching_Packs/BUILD/ — original lesson text, timings and teacher notes retained.
+https://madebymatt.uk/Lessons/Science_Teesside/Build/ — existing Made by Matt scientific artwork, where shown.
+[/Sources]</a:t>
+            </a:r>
+          </a:p>
         </p:txBody>
       </p:sp>
       <p:sp>
@@ -959,6 +995,15 @@
               <a:t>[/Sources]</a:t>
             </a:r>
           </a:p>
+          <a:p xmlns:a="http://schemas.openxmlformats.org/drawingml/2006/main">
+            <a:r>
+              <a:t>
+[Sources]
+https://madebymatt.uk/Lessons/Science_Teesside/Teaching_Packs/BUILD/ — original lesson text, timings and teacher notes retained.
+https://madebymatt.uk/Lessons/Science_Teesside/Build/ — existing Made by Matt scientific artwork, where shown.
+[/Sources]</a:t>
+            </a:r>
+          </a:p>
         </p:txBody>
       </p:sp>
       <p:sp>
@@ -1074,6 +1119,15 @@
               <a:t>[/Sources]</a:t>
             </a:r>
           </a:p>
+          <a:p xmlns:a="http://schemas.openxmlformats.org/drawingml/2006/main">
+            <a:r>
+              <a:t>
+[Sources]
+https://madebymatt.uk/Lessons/Science_Teesside/Teaching_Packs/BUILD/ — original lesson text, timings and teacher notes retained.
+https://madebymatt.uk/Lessons/Science_Teesside/Build/ — existing Made by Matt scientific artwork, where shown.
+[/Sources]</a:t>
+            </a:r>
+          </a:p>
         </p:txBody>
       </p:sp>
       <p:sp>
@@ -1189,6 +1243,15 @@
               <a:t>[/Sources]</a:t>
             </a:r>
           </a:p>
+          <a:p xmlns:a="http://schemas.openxmlformats.org/drawingml/2006/main">
+            <a:r>
+              <a:t>
+[Sources]
+https://madebymatt.uk/Lessons/Science_Teesside/Teaching_Packs/BUILD/ — original lesson text, timings and teacher notes retained.
+https://madebymatt.uk/Lessons/Science_Teesside/Build/ — existing Made by Matt scientific artwork, where shown.
+[/Sources]</a:t>
+            </a:r>
+          </a:p>
         </p:txBody>
       </p:sp>
       <p:sp>
@@ -1304,6 +1367,15 @@
               <a:t>[/Sources]</a:t>
             </a:r>
           </a:p>
+          <a:p xmlns:a="http://schemas.openxmlformats.org/drawingml/2006/main">
+            <a:r>
+              <a:t>
+[Sources]
+https://madebymatt.uk/Lessons/Science_Teesside/Teaching_Packs/BUILD/ — original lesson text, timings and teacher notes retained.
+https://madebymatt.uk/Lessons/Science_Teesside/Build/ — existing Made by Matt scientific artwork, where shown.
+[/Sources]</a:t>
+            </a:r>
+          </a:p>
         </p:txBody>
       </p:sp>
       <p:sp>
@@ -1419,6 +1491,15 @@
               <a:t>[/Sources]</a:t>
             </a:r>
           </a:p>
+          <a:p xmlns:a="http://schemas.openxmlformats.org/drawingml/2006/main">
+            <a:r>
+              <a:t>
+[Sources]
+https://madebymatt.uk/Lessons/Science_Teesside/Teaching_Packs/BUILD/ — original lesson text, timings and teacher notes retained.
+https://madebymatt.uk/Lessons/Science_Teesside/Build/ — existing Made by Matt scientific artwork, where shown.
+[/Sources]</a:t>
+            </a:r>
+          </a:p>
         </p:txBody>
       </p:sp>
       <p:sp>
@@ -1532,6 +1613,15 @@
           <a:p xmlns:a="http://schemas.openxmlformats.org/drawingml/2006/main">
             <a:r>
               <a:t>[/Sources]</a:t>
+            </a:r>
+          </a:p>
+          <a:p xmlns:a="http://schemas.openxmlformats.org/drawingml/2006/main">
+            <a:r>
+              <a:t>
+[Sources]
+https://madebymatt.uk/Lessons/Science_Teesside/Teaching_Packs/BUILD/ — original lesson text, timings and teacher notes retained.
+https://madebymatt.uk/Lessons/Science_Teesside/Build/ — existing Made by Matt scientific artwork, where shown.
+[/Sources]</a:t>
             </a:r>
           </a:p>
         </p:txBody>
@@ -1599,7 +1689,7 @@
   </p:cSld>
   <p:clrMap bg1="lt1" tx1="dk1" bg2="lt2" tx2="dk2" accent1="accent1" accent2="accent2" accent3="accent3" accent4="accent4" accent5="accent5" accent6="accent6" hlink="hlink" folHlink="folHlink"/>
   <p:sldLayoutIdLst>
-    <p:sldLayoutId xmlns:r="http://schemas.openxmlformats.org/officeDocument/2006/relationships" id="2147483649" r:id="Rd31815a3a37c4b13"/>
+    <p:sldLayoutId xmlns:r="http://schemas.openxmlformats.org/officeDocument/2006/relationships" id="2147483649" r:id="Rc34d3768d5e6471c"/>
   </p:sldLayoutIdLst>
   <p:txStyles>
     <p:titleStyle>
@@ -2132,7 +2222,7 @@
     <p:bg>
       <p:bgPr>
         <a:solidFill xmlns:a="http://schemas.openxmlformats.org/drawingml/2006/main">
-          <a:srgbClr val="F5F1E8"/>
+          <a:srgbClr val="FBF9F3"/>
         </a:solidFill>
       </p:bgPr>
     </p:bg>
@@ -2161,8 +2251,8 @@
         </p:nvSpPr>
         <p:spPr>
           <a:xfrm xmlns:a="http://schemas.openxmlformats.org/drawingml/2006/main">
-            <a:off x="609600" y="552450"/>
-            <a:ext cx="781050" cy="57150"/>
+            <a:off x="609600" y="742950"/>
+            <a:ext cx="9906000" cy="38100"/>
           </a:xfrm>
           <a:prstGeom xmlns:a="http://schemas.openxmlformats.org/drawingml/2006/main" prst="rect">
             <a:avLst/>
@@ -2192,8 +2282,8 @@
         </p:nvSpPr>
         <p:spPr>
           <a:xfrm xmlns:a="http://schemas.openxmlformats.org/drawingml/2006/main">
-            <a:off x="609600" y="762000"/>
-            <a:ext cx="9334500" cy="285750"/>
+            <a:off x="609600" y="342900"/>
+            <a:ext cx="9334500" cy="266700"/>
           </a:xfrm>
           <a:prstGeom xmlns:a="http://schemas.openxmlformats.org/drawingml/2006/main" prst="rect">
             <a:avLst/>
@@ -2205,21 +2295,30 @@
           </a:ln>
         </p:spPr>
         <p:txBody>
-          <a:bodyPr xmlns:a="http://schemas.openxmlformats.org/drawingml/2006/main" lIns="0" tIns="0" rIns="0" bIns="0" anchor="ctr"/>
+          <a:bodyPr xmlns:a="http://schemas.openxmlformats.org/drawingml/2006/main" wrap="square" lIns="0" tIns="0" rIns="0" bIns="0" anchor="ctr">
+            <a:noAutofit/>
+          </a:bodyPr>
           <a:lstStyle xmlns:a="http://schemas.openxmlformats.org/drawingml/2006/main"/>
           <a:p xmlns:a="http://schemas.openxmlformats.org/drawingml/2006/main">
             <a:pPr>
-              <a:defRPr sz="1500" b="1">
+              <a:buNone/>
+              <a:defRPr sz="1425" b="1">
                 <a:solidFill>
                   <a:srgbClr val="28685E"/>
                 </a:solidFill>
+                <a:latin typeface="Arial"/>
+                <a:ea typeface="Arial"/>
+                <a:cs typeface="Arial"/>
               </a:defRPr>
             </a:pPr>
             <a:r>
-              <a:rPr sz="1500" b="1">
+              <a:rPr sz="1425" b="1">
                 <a:solidFill>
                   <a:srgbClr val="28685E"/>
                 </a:solidFill>
+                <a:latin typeface="Arial"/>
+                <a:ea typeface="Arial"/>
+                <a:cs typeface="Arial"/>
               </a:rPr>
               <a:t>MADE BY MATT  /  BUILD SCIENCE</a:t>
             </a:r>
@@ -2228,14 +2327,14 @@
       </p:sp>
       <p:pic>
         <p:nvPicPr>
-          <p:cNvPr id="12" name=""/>
+          <p:cNvPr id="15" name=""/>
           <p:cNvPicPr>
             <a:picLocks xmlns:a="http://schemas.openxmlformats.org/drawingml/2006/main" noChangeAspect="1"/>
           </p:cNvPicPr>
           <p:nvPr/>
         </p:nvPicPr>
         <p:blipFill>
-          <a:blip xmlns:r="http://schemas.openxmlformats.org/officeDocument/2006/relationships" xmlns:a="http://schemas.openxmlformats.org/drawingml/2006/main" r:embed="R355beeb4a1be4e78"/>
+          <a:blip xmlns:r="http://schemas.openxmlformats.org/officeDocument/2006/relationships" xmlns:a="http://schemas.openxmlformats.org/drawingml/2006/main" r:embed="Ref08433745c74964"/>
           <a:stretch xmlns:a="http://schemas.openxmlformats.org/drawingml/2006/main"/>
         </p:blipFill>
         <p:spPr>
@@ -2264,8 +2363,8 @@
         </p:nvSpPr>
         <p:spPr>
           <a:xfrm xmlns:a="http://schemas.openxmlformats.org/drawingml/2006/main">
-            <a:off x="609600" y="1352550"/>
-            <a:ext cx="10972800" cy="952500"/>
+            <a:off x="609600" y="1047750"/>
+            <a:ext cx="10972800" cy="895350"/>
           </a:xfrm>
           <a:prstGeom xmlns:a="http://schemas.openxmlformats.org/drawingml/2006/main" prst="rect">
             <a:avLst/>
@@ -2277,21 +2376,30 @@
           </a:ln>
         </p:spPr>
         <p:txBody>
-          <a:bodyPr xmlns:a="http://schemas.openxmlformats.org/drawingml/2006/main" lIns="0" tIns="0" rIns="0" bIns="0" anchor="ctr"/>
+          <a:bodyPr xmlns:a="http://schemas.openxmlformats.org/drawingml/2006/main" wrap="square" lIns="0" tIns="0" rIns="0" bIns="0" anchor="ctr">
+            <a:noAutofit/>
+          </a:bodyPr>
           <a:lstStyle xmlns:a="http://schemas.openxmlformats.org/drawingml/2006/main"/>
           <a:p xmlns:a="http://schemas.openxmlformats.org/drawingml/2006/main">
             <a:pPr>
-              <a:defRPr sz="3750" b="1">
+              <a:buNone/>
+              <a:defRPr sz="3600" b="1">
                 <a:solidFill>
                   <a:srgbClr val="152B3A"/>
                 </a:solidFill>
+                <a:latin typeface="Arial"/>
+                <a:ea typeface="Arial"/>
+                <a:cs typeface="Arial"/>
               </a:defRPr>
             </a:pPr>
             <a:r>
-              <a:rPr sz="3750" b="1">
+              <a:rPr sz="3600" b="1">
                 <a:solidFill>
                   <a:srgbClr val="152B3A"/>
                 </a:solidFill>
+                <a:latin typeface="Arial"/>
+                <a:ea typeface="Arial"/>
+                <a:cs typeface="Arial"/>
               </a:rPr>
               <a:t>Food-jobs evidence mission</a:t>
             </a:r>
@@ -2358,21 +2466,30 @@
           </a:ln>
         </p:spPr>
         <p:txBody>
-          <a:bodyPr xmlns:a="http://schemas.openxmlformats.org/drawingml/2006/main" lIns="0" tIns="0" rIns="0" bIns="0" anchor="ctr"/>
+          <a:bodyPr xmlns:a="http://schemas.openxmlformats.org/drawingml/2006/main" wrap="square" lIns="0" tIns="0" rIns="0" bIns="0" anchor="ctr">
+            <a:noAutofit/>
+          </a:bodyPr>
           <a:lstStyle xmlns:a="http://schemas.openxmlformats.org/drawingml/2006/main"/>
           <a:p xmlns:a="http://schemas.openxmlformats.org/drawingml/2006/main">
             <a:pPr>
-              <a:defRPr sz="1275" b="0">
+              <a:buNone/>
+              <a:defRPr sz="1200" b="0">
                 <a:solidFill>
                   <a:srgbClr val="50616B"/>
                 </a:solidFill>
+                <a:latin typeface="Arial"/>
+                <a:ea typeface="Arial"/>
+                <a:cs typeface="Arial"/>
               </a:defRPr>
             </a:pPr>
             <a:r>
-              <a:rPr sz="1275" b="0">
+              <a:rPr sz="1200" b="0">
                 <a:solidFill>
                   <a:srgbClr val="50616B"/>
                 </a:solidFill>
+                <a:latin typeface="Arial"/>
+                <a:ea typeface="Arial"/>
+                <a:cs typeface="Arial"/>
               </a:rPr>
               <a:t>AUTUMN 1  ·  WEEK 5  ·  LESSON B</a:t>
             </a:r>
@@ -2408,14 +2525,20 @@
           </a:ln>
         </p:spPr>
         <p:txBody>
-          <a:bodyPr xmlns:a="http://schemas.openxmlformats.org/drawingml/2006/main" lIns="0" tIns="0" rIns="0" bIns="0" anchor="ctr"/>
+          <a:bodyPr xmlns:a="http://schemas.openxmlformats.org/drawingml/2006/main" wrap="square" lIns="0" tIns="0" rIns="0" bIns="0" anchor="ctr">
+            <a:noAutofit/>
+          </a:bodyPr>
           <a:lstStyle xmlns:a="http://schemas.openxmlformats.org/drawingml/2006/main"/>
           <a:p xmlns:a="http://schemas.openxmlformats.org/drawingml/2006/main">
             <a:pPr>
+              <a:buNone/>
               <a:defRPr sz="1350" b="1">
                 <a:solidFill>
                   <a:srgbClr val="28685E"/>
                 </a:solidFill>
+                <a:latin typeface="Arial"/>
+                <a:ea typeface="Arial"/>
+                <a:cs typeface="Arial"/>
               </a:defRPr>
             </a:pPr>
             <a:r>
@@ -2423,6 +2546,9 @@
                 <a:solidFill>
                   <a:srgbClr val="28685E"/>
                 </a:solidFill>
+                <a:latin typeface="Arial"/>
+                <a:ea typeface="Arial"/>
+                <a:cs typeface="Arial"/>
               </a:rPr>
               <a:t>01</a:t>
             </a:r>
@@ -2445,8 +2571,8 @@
         </p:nvSpPr>
         <p:spPr>
           <a:xfrm xmlns:a="http://schemas.openxmlformats.org/drawingml/2006/main">
-            <a:off x="609600" y="2809875"/>
-            <a:ext cx="10668000" cy="1000125"/>
+            <a:off x="609600" y="2400300"/>
+            <a:ext cx="6191250" cy="1409700"/>
           </a:xfrm>
           <a:prstGeom xmlns:a="http://schemas.openxmlformats.org/drawingml/2006/main" prst="rect">
             <a:avLst/>
@@ -2458,21 +2584,30 @@
           </a:ln>
         </p:spPr>
         <p:txBody>
-          <a:bodyPr xmlns:a="http://schemas.openxmlformats.org/drawingml/2006/main" lIns="0" tIns="0" rIns="0" bIns="0" anchor="ctr"/>
+          <a:bodyPr xmlns:a="http://schemas.openxmlformats.org/drawingml/2006/main" wrap="square" lIns="0" tIns="0" rIns="0" bIns="0" anchor="ctr">
+            <a:noAutofit/>
+          </a:bodyPr>
           <a:lstStyle xmlns:a="http://schemas.openxmlformats.org/drawingml/2006/main"/>
           <a:p xmlns:a="http://schemas.openxmlformats.org/drawingml/2006/main">
             <a:pPr>
-              <a:defRPr sz="3900" b="1">
+              <a:buNone/>
+              <a:defRPr sz="3450" b="1">
                 <a:solidFill>
                   <a:srgbClr val="28685E"/>
                 </a:solidFill>
+                <a:latin typeface="Arial"/>
+                <a:ea typeface="Arial"/>
+                <a:cs typeface="Arial"/>
               </a:defRPr>
             </a:pPr>
             <a:r>
-              <a:rPr sz="3900" b="1">
+              <a:rPr sz="3450" b="1">
                 <a:solidFill>
                   <a:srgbClr val="28685E"/>
                 </a:solidFill>
+                <a:latin typeface="Arial"/>
+                <a:ea typeface="Arial"/>
+                <a:cs typeface="Arial"/>
               </a:rPr>
               <a:t>Choose. Explain. Revise.</a:t>
             </a:r>
@@ -2495,8 +2630,8 @@
         </p:nvSpPr>
         <p:spPr>
           <a:xfrm xmlns:a="http://schemas.openxmlformats.org/drawingml/2006/main">
-            <a:off x="609600" y="4143375"/>
-            <a:ext cx="10668000" cy="1143000"/>
+            <a:off x="609600" y="4286250"/>
+            <a:ext cx="6667500" cy="1314450"/>
           </a:xfrm>
           <a:prstGeom xmlns:a="http://schemas.openxmlformats.org/drawingml/2006/main" prst="rect">
             <a:avLst/>
@@ -2508,27 +2643,58 @@
           </a:ln>
         </p:spPr>
         <p:txBody>
-          <a:bodyPr xmlns:a="http://schemas.openxmlformats.org/drawingml/2006/main" lIns="0" tIns="0" rIns="0" bIns="0" anchor="ctr"/>
+          <a:bodyPr xmlns:a="http://schemas.openxmlformats.org/drawingml/2006/main" wrap="square" lIns="0" tIns="0" rIns="0" bIns="0" anchor="ctr">
+            <a:noAutofit/>
+          </a:bodyPr>
           <a:lstStyle xmlns:a="http://schemas.openxmlformats.org/drawingml/2006/main"/>
           <a:p xmlns:a="http://schemas.openxmlformats.org/drawingml/2006/main">
             <a:pPr>
-              <a:defRPr sz="2550" b="0">
+              <a:buNone/>
+              <a:defRPr sz="2400" b="0">
                 <a:solidFill>
                   <a:srgbClr val="152B3A"/>
                 </a:solidFill>
+                <a:latin typeface="Arial"/>
+                <a:ea typeface="Arial"/>
+                <a:cs typeface="Arial"/>
               </a:defRPr>
             </a:pPr>
             <a:r>
-              <a:rPr sz="2550" b="0">
+              <a:rPr sz="2400" b="0">
                 <a:solidFill>
                   <a:srgbClr val="152B3A"/>
                 </a:solidFill>
+                <a:latin typeface="Arial"/>
+                <a:ea typeface="Arial"/>
+                <a:cs typeface="Arial"/>
               </a:rPr>
               <a:t>I can use food information to improve a fictional model.</a:t>
             </a:r>
           </a:p>
         </p:txBody>
       </p:sp>
+      <p:pic>
+        <p:nvPicPr>
+          <p:cNvPr id="22" name=""/>
+          <p:cNvPicPr>
+            <a:picLocks xmlns:a="http://schemas.openxmlformats.org/drawingml/2006/main" noChangeAspect="1"/>
+          </p:cNvPicPr>
+          <p:nvPr/>
+        </p:nvPicPr>
+        <p:blipFill>
+          <a:blip xmlns:r="http://schemas.openxmlformats.org/officeDocument/2006/relationships" xmlns:a="http://schemas.openxmlformats.org/drawingml/2006/main" r:embed="Rc631852cee1c4e8f"/>
+          <a:stretch xmlns:a="http://schemas.openxmlformats.org/drawingml/2006/main"/>
+        </p:blipFill>
+        <p:spPr>
+          <a:xfrm xmlns:a="http://schemas.openxmlformats.org/drawingml/2006/main">
+            <a:off x="7620000" y="2578298"/>
+            <a:ext cx="3714750" cy="2368153"/>
+          </a:xfrm>
+          <a:prstGeom xmlns:a="http://schemas.openxmlformats.org/drawingml/2006/main" prst="rect">
+            <a:avLst/>
+          </a:prstGeom>
+        </p:spPr>
+      </p:pic>
     </p:spTree>
     <p:extLst>
       <p:ext uri="{BB962C8B-B14F-4D97-AF65-F5344CB8AC3E}">
@@ -2545,7 +2711,7 @@
     <p:bg>
       <p:bgPr>
         <a:solidFill xmlns:a="http://schemas.openxmlformats.org/drawingml/2006/main">
-          <a:srgbClr val="F5F1E8"/>
+          <a:srgbClr val="FBF9F3"/>
         </a:solidFill>
       </p:bgPr>
     </p:bg>
@@ -2574,8 +2740,8 @@
         </p:nvSpPr>
         <p:spPr>
           <a:xfrm xmlns:a="http://schemas.openxmlformats.org/drawingml/2006/main">
-            <a:off x="609600" y="552450"/>
-            <a:ext cx="781050" cy="57150"/>
+            <a:off x="609600" y="742950"/>
+            <a:ext cx="9906000" cy="38100"/>
           </a:xfrm>
           <a:prstGeom xmlns:a="http://schemas.openxmlformats.org/drawingml/2006/main" prst="rect">
             <a:avLst/>
@@ -2605,8 +2771,8 @@
         </p:nvSpPr>
         <p:spPr>
           <a:xfrm xmlns:a="http://schemas.openxmlformats.org/drawingml/2006/main">
-            <a:off x="609600" y="762000"/>
-            <a:ext cx="9334500" cy="285750"/>
+            <a:off x="609600" y="342900"/>
+            <a:ext cx="9334500" cy="266700"/>
           </a:xfrm>
           <a:prstGeom xmlns:a="http://schemas.openxmlformats.org/drawingml/2006/main" prst="rect">
             <a:avLst/>
@@ -2618,21 +2784,30 @@
           </a:ln>
         </p:spPr>
         <p:txBody>
-          <a:bodyPr xmlns:a="http://schemas.openxmlformats.org/drawingml/2006/main" lIns="0" tIns="0" rIns="0" bIns="0" anchor="ctr"/>
+          <a:bodyPr xmlns:a="http://schemas.openxmlformats.org/drawingml/2006/main" wrap="square" lIns="0" tIns="0" rIns="0" bIns="0" anchor="ctr">
+            <a:noAutofit/>
+          </a:bodyPr>
           <a:lstStyle xmlns:a="http://schemas.openxmlformats.org/drawingml/2006/main"/>
           <a:p xmlns:a="http://schemas.openxmlformats.org/drawingml/2006/main">
             <a:pPr>
-              <a:defRPr sz="1500" b="1">
+              <a:buNone/>
+              <a:defRPr sz="1425" b="1">
                 <a:solidFill>
                   <a:srgbClr val="28685E"/>
                 </a:solidFill>
+                <a:latin typeface="Arial"/>
+                <a:ea typeface="Arial"/>
+                <a:cs typeface="Arial"/>
               </a:defRPr>
             </a:pPr>
             <a:r>
-              <a:rPr sz="1500" b="1">
+              <a:rPr sz="1425" b="1">
                 <a:solidFill>
                   <a:srgbClr val="28685E"/>
                 </a:solidFill>
+                <a:latin typeface="Arial"/>
+                <a:ea typeface="Arial"/>
+                <a:cs typeface="Arial"/>
               </a:rPr>
               <a:t>MADE BY MATT  /  BUILD SCIENCE</a:t>
             </a:r>
@@ -2641,14 +2816,14 @@
       </p:sp>
       <p:pic>
         <p:nvPicPr>
-          <p:cNvPr id="13" name=""/>
+          <p:cNvPr id="15" name=""/>
           <p:cNvPicPr>
             <a:picLocks xmlns:a="http://schemas.openxmlformats.org/drawingml/2006/main" noChangeAspect="1"/>
           </p:cNvPicPr>
           <p:nvPr/>
         </p:nvPicPr>
         <p:blipFill>
-          <a:blip xmlns:r="http://schemas.openxmlformats.org/officeDocument/2006/relationships" xmlns:a="http://schemas.openxmlformats.org/drawingml/2006/main" r:embed="R9bc88569627544a3"/>
+          <a:blip xmlns:r="http://schemas.openxmlformats.org/officeDocument/2006/relationships" xmlns:a="http://schemas.openxmlformats.org/drawingml/2006/main" r:embed="Rfbc54cc6f084446a"/>
           <a:stretch xmlns:a="http://schemas.openxmlformats.org/drawingml/2006/main"/>
         </p:blipFill>
         <p:spPr>
@@ -2677,8 +2852,8 @@
         </p:nvSpPr>
         <p:spPr>
           <a:xfrm xmlns:a="http://schemas.openxmlformats.org/drawingml/2006/main">
-            <a:off x="609600" y="1352550"/>
-            <a:ext cx="10972800" cy="952500"/>
+            <a:off x="609600" y="1047750"/>
+            <a:ext cx="10972800" cy="895350"/>
           </a:xfrm>
           <a:prstGeom xmlns:a="http://schemas.openxmlformats.org/drawingml/2006/main" prst="rect">
             <a:avLst/>
@@ -2690,21 +2865,30 @@
           </a:ln>
         </p:spPr>
         <p:txBody>
-          <a:bodyPr xmlns:a="http://schemas.openxmlformats.org/drawingml/2006/main" lIns="0" tIns="0" rIns="0" bIns="0" anchor="ctr"/>
+          <a:bodyPr xmlns:a="http://schemas.openxmlformats.org/drawingml/2006/main" wrap="square" lIns="0" tIns="0" rIns="0" bIns="0" anchor="ctr">
+            <a:noAutofit/>
+          </a:bodyPr>
           <a:lstStyle xmlns:a="http://schemas.openxmlformats.org/drawingml/2006/main"/>
           <a:p xmlns:a="http://schemas.openxmlformats.org/drawingml/2006/main">
             <a:pPr>
-              <a:defRPr sz="3750" b="1">
+              <a:buNone/>
+              <a:defRPr sz="3600" b="1">
                 <a:solidFill>
                   <a:srgbClr val="152B3A"/>
                 </a:solidFill>
+                <a:latin typeface="Arial"/>
+                <a:ea typeface="Arial"/>
+                <a:cs typeface="Arial"/>
               </a:defRPr>
             </a:pPr>
             <a:r>
-              <a:rPr sz="3750" b="1">
+              <a:rPr sz="3600" b="1">
                 <a:solidFill>
                   <a:srgbClr val="152B3A"/>
                 </a:solidFill>
+                <a:latin typeface="Arial"/>
+                <a:ea typeface="Arial"/>
+                <a:cs typeface="Arial"/>
               </a:rPr>
               <a:t>Explain a food job</a:t>
             </a:r>
@@ -2771,21 +2955,30 @@
           </a:ln>
         </p:spPr>
         <p:txBody>
-          <a:bodyPr xmlns:a="http://schemas.openxmlformats.org/drawingml/2006/main" lIns="0" tIns="0" rIns="0" bIns="0" anchor="ctr"/>
+          <a:bodyPr xmlns:a="http://schemas.openxmlformats.org/drawingml/2006/main" wrap="square" lIns="0" tIns="0" rIns="0" bIns="0" anchor="ctr">
+            <a:noAutofit/>
+          </a:bodyPr>
           <a:lstStyle xmlns:a="http://schemas.openxmlformats.org/drawingml/2006/main"/>
           <a:p xmlns:a="http://schemas.openxmlformats.org/drawingml/2006/main">
             <a:pPr>
-              <a:defRPr sz="1275" b="0">
+              <a:buNone/>
+              <a:defRPr sz="1200" b="0">
                 <a:solidFill>
                   <a:srgbClr val="50616B"/>
                 </a:solidFill>
+                <a:latin typeface="Arial"/>
+                <a:ea typeface="Arial"/>
+                <a:cs typeface="Arial"/>
               </a:defRPr>
             </a:pPr>
             <a:r>
-              <a:rPr sz="1275" b="0">
+              <a:rPr sz="1200" b="0">
                 <a:solidFill>
                   <a:srgbClr val="50616B"/>
                 </a:solidFill>
+                <a:latin typeface="Arial"/>
+                <a:ea typeface="Arial"/>
+                <a:cs typeface="Arial"/>
               </a:rPr>
               <a:t>AUTUMN 1  ·  WEEK 5  ·  LESSON B</a:t>
             </a:r>
@@ -2821,14 +3014,20 @@
           </a:ln>
         </p:spPr>
         <p:txBody>
-          <a:bodyPr xmlns:a="http://schemas.openxmlformats.org/drawingml/2006/main" lIns="0" tIns="0" rIns="0" bIns="0" anchor="ctr"/>
+          <a:bodyPr xmlns:a="http://schemas.openxmlformats.org/drawingml/2006/main" wrap="square" lIns="0" tIns="0" rIns="0" bIns="0" anchor="ctr">
+            <a:noAutofit/>
+          </a:bodyPr>
           <a:lstStyle xmlns:a="http://schemas.openxmlformats.org/drawingml/2006/main"/>
           <a:p xmlns:a="http://schemas.openxmlformats.org/drawingml/2006/main">
             <a:pPr>
+              <a:buNone/>
               <a:defRPr sz="1350" b="1">
                 <a:solidFill>
                   <a:srgbClr val="28685E"/>
                 </a:solidFill>
+                <a:latin typeface="Arial"/>
+                <a:ea typeface="Arial"/>
+                <a:cs typeface="Arial"/>
               </a:defRPr>
             </a:pPr>
             <a:r>
@@ -2836,6 +3035,9 @@
                 <a:solidFill>
                   <a:srgbClr val="28685E"/>
                 </a:solidFill>
+                <a:latin typeface="Arial"/>
+                <a:ea typeface="Arial"/>
+                <a:cs typeface="Arial"/>
               </a:rPr>
               <a:t>10</a:t>
             </a:r>
@@ -2858,8 +3060,8 @@
         </p:nvSpPr>
         <p:spPr>
           <a:xfrm xmlns:a="http://schemas.openxmlformats.org/drawingml/2006/main">
-            <a:off x="609600" y="2619375"/>
-            <a:ext cx="10972800" cy="781050"/>
+            <a:off x="609600" y="2305050"/>
+            <a:ext cx="10972800" cy="914400"/>
           </a:xfrm>
           <a:prstGeom xmlns:a="http://schemas.openxmlformats.org/drawingml/2006/main" prst="rect">
             <a:avLst/>
@@ -2871,14 +3073,20 @@
           </a:ln>
         </p:spPr>
         <p:txBody>
-          <a:bodyPr xmlns:a="http://schemas.openxmlformats.org/drawingml/2006/main" lIns="0" tIns="0" rIns="0" bIns="0" anchor="ctr"/>
+          <a:bodyPr xmlns:a="http://schemas.openxmlformats.org/drawingml/2006/main" wrap="square" lIns="0" tIns="0" rIns="0" bIns="0" anchor="ctr">
+            <a:noAutofit/>
+          </a:bodyPr>
           <a:lstStyle xmlns:a="http://schemas.openxmlformats.org/drawingml/2006/main"/>
           <a:p xmlns:a="http://schemas.openxmlformats.org/drawingml/2006/main">
             <a:pPr>
+              <a:buNone/>
               <a:defRPr sz="2550" b="0">
                 <a:solidFill>
                   <a:srgbClr val="152B3A"/>
                 </a:solidFill>
+                <a:latin typeface="Arial"/>
+                <a:ea typeface="Arial"/>
+                <a:cs typeface="Arial"/>
               </a:defRPr>
             </a:pPr>
             <a:r>
@@ -2886,6 +3094,9 @@
                 <a:solidFill>
                   <a:srgbClr val="152B3A"/>
                 </a:solidFill>
+                <a:latin typeface="Arial"/>
+                <a:ea typeface="Arial"/>
+                <a:cs typeface="Arial"/>
               </a:rPr>
               <a:t>Supported: name one body job of food.</a:t>
             </a:r>
@@ -2908,8 +3119,8 @@
         </p:nvSpPr>
         <p:spPr>
           <a:xfrm xmlns:a="http://schemas.openxmlformats.org/drawingml/2006/main">
-            <a:off x="609600" y="3476625"/>
-            <a:ext cx="10972800" cy="781050"/>
+            <a:off x="609600" y="3352800"/>
+            <a:ext cx="10972800" cy="914400"/>
           </a:xfrm>
           <a:prstGeom xmlns:a="http://schemas.openxmlformats.org/drawingml/2006/main" prst="rect">
             <a:avLst/>
@@ -2921,14 +3132,20 @@
           </a:ln>
         </p:spPr>
         <p:txBody>
-          <a:bodyPr xmlns:a="http://schemas.openxmlformats.org/drawingml/2006/main" lIns="0" tIns="0" rIns="0" bIns="0" anchor="ctr"/>
+          <a:bodyPr xmlns:a="http://schemas.openxmlformats.org/drawingml/2006/main" wrap="square" lIns="0" tIns="0" rIns="0" bIns="0" anchor="ctr">
+            <a:noAutofit/>
+          </a:bodyPr>
           <a:lstStyle xmlns:a="http://schemas.openxmlformats.org/drawingml/2006/main"/>
           <a:p xmlns:a="http://schemas.openxmlformats.org/drawingml/2006/main">
             <a:pPr>
+              <a:buNone/>
               <a:defRPr sz="2550" b="0">
                 <a:solidFill>
                   <a:srgbClr val="152B3A"/>
                 </a:solidFill>
+                <a:latin typeface="Arial"/>
+                <a:ea typeface="Arial"/>
+                <a:cs typeface="Arial"/>
               </a:defRPr>
             </a:pPr>
             <a:r>
@@ -2936,6 +3153,9 @@
                 <a:solidFill>
                   <a:srgbClr val="152B3A"/>
                 </a:solidFill>
+                <a:latin typeface="Arial"/>
+                <a:ea typeface="Arial"/>
+                <a:cs typeface="Arial"/>
               </a:rPr>
               <a:t>Standard: explain why variety matters.</a:t>
             </a:r>
@@ -2958,8 +3178,8 @@
         </p:nvSpPr>
         <p:spPr>
           <a:xfrm xmlns:a="http://schemas.openxmlformats.org/drawingml/2006/main">
-            <a:off x="609600" y="4333875"/>
-            <a:ext cx="10972800" cy="781050"/>
+            <a:off x="609600" y="4400550"/>
+            <a:ext cx="10972800" cy="914400"/>
           </a:xfrm>
           <a:prstGeom xmlns:a="http://schemas.openxmlformats.org/drawingml/2006/main" prst="rect">
             <a:avLst/>
@@ -2971,21 +3191,30 @@
           </a:ln>
         </p:spPr>
         <p:txBody>
-          <a:bodyPr xmlns:a="http://schemas.openxmlformats.org/drawingml/2006/main" lIns="0" tIns="0" rIns="0" bIns="0" anchor="ctr"/>
+          <a:bodyPr xmlns:a="http://schemas.openxmlformats.org/drawingml/2006/main" wrap="square" lIns="0" tIns="0" rIns="0" bIns="0" anchor="ctr">
+            <a:noAutofit/>
+          </a:bodyPr>
           <a:lstStyle xmlns:a="http://schemas.openxmlformats.org/drawingml/2006/main"/>
           <a:p xmlns:a="http://schemas.openxmlformats.org/drawingml/2006/main">
             <a:pPr>
-              <a:defRPr sz="2550" b="0">
-                <a:solidFill>
-                  <a:srgbClr val="152B3A"/>
-                </a:solidFill>
+              <a:buNone/>
+              <a:defRPr sz="2550" b="1">
+                <a:solidFill>
+                  <a:srgbClr val="28685E"/>
+                </a:solidFill>
+                <a:latin typeface="Arial"/>
+                <a:ea typeface="Arial"/>
+                <a:cs typeface="Arial"/>
               </a:defRPr>
             </a:pPr>
             <a:r>
-              <a:rPr sz="2550" b="0">
-                <a:solidFill>
-                  <a:srgbClr val="152B3A"/>
-                </a:solidFill>
+              <a:rPr sz="2550" b="1">
+                <a:solidFill>
+                  <a:srgbClr val="28685E"/>
+                </a:solidFill>
+                <a:latin typeface="Arial"/>
+                <a:ea typeface="Arial"/>
+                <a:cs typeface="Arial"/>
               </a:rPr>
               <a:t>Stretch: can one food help several jobs?</a:t>
             </a:r>
@@ -3008,7 +3237,7 @@
     <p:bg>
       <p:bgPr>
         <a:solidFill xmlns:a="http://schemas.openxmlformats.org/drawingml/2006/main">
-          <a:srgbClr val="F5F1E8"/>
+          <a:srgbClr val="FBF9F3"/>
         </a:solidFill>
       </p:bgPr>
     </p:bg>
@@ -3037,8 +3266,8 @@
         </p:nvSpPr>
         <p:spPr>
           <a:xfrm xmlns:a="http://schemas.openxmlformats.org/drawingml/2006/main">
-            <a:off x="609600" y="552450"/>
-            <a:ext cx="781050" cy="57150"/>
+            <a:off x="609600" y="742950"/>
+            <a:ext cx="9906000" cy="38100"/>
           </a:xfrm>
           <a:prstGeom xmlns:a="http://schemas.openxmlformats.org/drawingml/2006/main" prst="rect">
             <a:avLst/>
@@ -3068,8 +3297,8 @@
         </p:nvSpPr>
         <p:spPr>
           <a:xfrm xmlns:a="http://schemas.openxmlformats.org/drawingml/2006/main">
-            <a:off x="609600" y="762000"/>
-            <a:ext cx="9334500" cy="285750"/>
+            <a:off x="609600" y="342900"/>
+            <a:ext cx="9334500" cy="266700"/>
           </a:xfrm>
           <a:prstGeom xmlns:a="http://schemas.openxmlformats.org/drawingml/2006/main" prst="rect">
             <a:avLst/>
@@ -3081,21 +3310,30 @@
           </a:ln>
         </p:spPr>
         <p:txBody>
-          <a:bodyPr xmlns:a="http://schemas.openxmlformats.org/drawingml/2006/main" lIns="0" tIns="0" rIns="0" bIns="0" anchor="ctr"/>
+          <a:bodyPr xmlns:a="http://schemas.openxmlformats.org/drawingml/2006/main" wrap="square" lIns="0" tIns="0" rIns="0" bIns="0" anchor="ctr">
+            <a:noAutofit/>
+          </a:bodyPr>
           <a:lstStyle xmlns:a="http://schemas.openxmlformats.org/drawingml/2006/main"/>
           <a:p xmlns:a="http://schemas.openxmlformats.org/drawingml/2006/main">
             <a:pPr>
-              <a:defRPr sz="1500" b="1">
+              <a:buNone/>
+              <a:defRPr sz="1425" b="1">
                 <a:solidFill>
                   <a:srgbClr val="28685E"/>
                 </a:solidFill>
+                <a:latin typeface="Arial"/>
+                <a:ea typeface="Arial"/>
+                <a:cs typeface="Arial"/>
               </a:defRPr>
             </a:pPr>
             <a:r>
-              <a:rPr sz="1500" b="1">
+              <a:rPr sz="1425" b="1">
                 <a:solidFill>
                   <a:srgbClr val="28685E"/>
                 </a:solidFill>
+                <a:latin typeface="Arial"/>
+                <a:ea typeface="Arial"/>
+                <a:cs typeface="Arial"/>
               </a:rPr>
               <a:t>MADE BY MATT  /  BUILD SCIENCE</a:t>
             </a:r>
@@ -3104,14 +3342,14 @@
       </p:sp>
       <p:pic>
         <p:nvPicPr>
-          <p:cNvPr id="13" name=""/>
+          <p:cNvPr id="15" name=""/>
           <p:cNvPicPr>
             <a:picLocks xmlns:a="http://schemas.openxmlformats.org/drawingml/2006/main" noChangeAspect="1"/>
           </p:cNvPicPr>
           <p:nvPr/>
         </p:nvPicPr>
         <p:blipFill>
-          <a:blip xmlns:r="http://schemas.openxmlformats.org/officeDocument/2006/relationships" xmlns:a="http://schemas.openxmlformats.org/drawingml/2006/main" r:embed="R52083ea2001d4f88"/>
+          <a:blip xmlns:r="http://schemas.openxmlformats.org/officeDocument/2006/relationships" xmlns:a="http://schemas.openxmlformats.org/drawingml/2006/main" r:embed="Rdefb310fb7874d1a"/>
           <a:stretch xmlns:a="http://schemas.openxmlformats.org/drawingml/2006/main"/>
         </p:blipFill>
         <p:spPr>
@@ -3140,8 +3378,8 @@
         </p:nvSpPr>
         <p:spPr>
           <a:xfrm xmlns:a="http://schemas.openxmlformats.org/drawingml/2006/main">
-            <a:off x="609600" y="1352550"/>
-            <a:ext cx="10972800" cy="952500"/>
+            <a:off x="609600" y="1047750"/>
+            <a:ext cx="10972800" cy="895350"/>
           </a:xfrm>
           <a:prstGeom xmlns:a="http://schemas.openxmlformats.org/drawingml/2006/main" prst="rect">
             <a:avLst/>
@@ -3153,21 +3391,30 @@
           </a:ln>
         </p:spPr>
         <p:txBody>
-          <a:bodyPr xmlns:a="http://schemas.openxmlformats.org/drawingml/2006/main" lIns="0" tIns="0" rIns="0" bIns="0" anchor="ctr"/>
+          <a:bodyPr xmlns:a="http://schemas.openxmlformats.org/drawingml/2006/main" wrap="square" lIns="0" tIns="0" rIns="0" bIns="0" anchor="ctr">
+            <a:noAutofit/>
+          </a:bodyPr>
           <a:lstStyle xmlns:a="http://schemas.openxmlformats.org/drawingml/2006/main"/>
           <a:p xmlns:a="http://schemas.openxmlformats.org/drawingml/2006/main">
             <a:pPr>
-              <a:defRPr sz="3750" b="1">
+              <a:buNone/>
+              <a:defRPr sz="3600" b="1">
                 <a:solidFill>
                   <a:srgbClr val="152B3A"/>
                 </a:solidFill>
+                <a:latin typeface="Arial"/>
+                <a:ea typeface="Arial"/>
+                <a:cs typeface="Arial"/>
               </a:defRPr>
             </a:pPr>
             <a:r>
-              <a:rPr sz="3750" b="1">
+              <a:rPr sz="3600" b="1">
                 <a:solidFill>
                   <a:srgbClr val="152B3A"/>
                 </a:solidFill>
+                <a:latin typeface="Arial"/>
+                <a:ea typeface="Arial"/>
+                <a:cs typeface="Arial"/>
               </a:rPr>
               <a:t>Retrieve the food-job cards</a:t>
             </a:r>
@@ -3234,21 +3481,30 @@
           </a:ln>
         </p:spPr>
         <p:txBody>
-          <a:bodyPr xmlns:a="http://schemas.openxmlformats.org/drawingml/2006/main" lIns="0" tIns="0" rIns="0" bIns="0" anchor="ctr"/>
+          <a:bodyPr xmlns:a="http://schemas.openxmlformats.org/drawingml/2006/main" wrap="square" lIns="0" tIns="0" rIns="0" bIns="0" anchor="ctr">
+            <a:noAutofit/>
+          </a:bodyPr>
           <a:lstStyle xmlns:a="http://schemas.openxmlformats.org/drawingml/2006/main"/>
           <a:p xmlns:a="http://schemas.openxmlformats.org/drawingml/2006/main">
             <a:pPr>
-              <a:defRPr sz="1275" b="0">
+              <a:buNone/>
+              <a:defRPr sz="1200" b="0">
                 <a:solidFill>
                   <a:srgbClr val="50616B"/>
                 </a:solidFill>
+                <a:latin typeface="Arial"/>
+                <a:ea typeface="Arial"/>
+                <a:cs typeface="Arial"/>
               </a:defRPr>
             </a:pPr>
             <a:r>
-              <a:rPr sz="1275" b="0">
+              <a:rPr sz="1200" b="0">
                 <a:solidFill>
                   <a:srgbClr val="50616B"/>
                 </a:solidFill>
+                <a:latin typeface="Arial"/>
+                <a:ea typeface="Arial"/>
+                <a:cs typeface="Arial"/>
               </a:rPr>
               <a:t>AUTUMN 1  ·  WEEK 5  ·  LESSON B</a:t>
             </a:r>
@@ -3284,14 +3540,20 @@
           </a:ln>
         </p:spPr>
         <p:txBody>
-          <a:bodyPr xmlns:a="http://schemas.openxmlformats.org/drawingml/2006/main" lIns="0" tIns="0" rIns="0" bIns="0" anchor="ctr"/>
+          <a:bodyPr xmlns:a="http://schemas.openxmlformats.org/drawingml/2006/main" wrap="square" lIns="0" tIns="0" rIns="0" bIns="0" anchor="ctr">
+            <a:noAutofit/>
+          </a:bodyPr>
           <a:lstStyle xmlns:a="http://schemas.openxmlformats.org/drawingml/2006/main"/>
           <a:p xmlns:a="http://schemas.openxmlformats.org/drawingml/2006/main">
             <a:pPr>
+              <a:buNone/>
               <a:defRPr sz="1350" b="1">
                 <a:solidFill>
                   <a:srgbClr val="28685E"/>
                 </a:solidFill>
+                <a:latin typeface="Arial"/>
+                <a:ea typeface="Arial"/>
+                <a:cs typeface="Arial"/>
               </a:defRPr>
             </a:pPr>
             <a:r>
@@ -3299,6 +3561,9 @@
                 <a:solidFill>
                   <a:srgbClr val="28685E"/>
                 </a:solidFill>
+                <a:latin typeface="Arial"/>
+                <a:ea typeface="Arial"/>
+                <a:cs typeface="Arial"/>
               </a:rPr>
               <a:t>02</a:t>
             </a:r>
@@ -3321,8 +3586,8 @@
         </p:nvSpPr>
         <p:spPr>
           <a:xfrm xmlns:a="http://schemas.openxmlformats.org/drawingml/2006/main">
-            <a:off x="609600" y="2619375"/>
-            <a:ext cx="10972800" cy="781050"/>
+            <a:off x="609600" y="2305050"/>
+            <a:ext cx="10972800" cy="914400"/>
           </a:xfrm>
           <a:prstGeom xmlns:a="http://schemas.openxmlformats.org/drawingml/2006/main" prst="rect">
             <a:avLst/>
@@ -3334,14 +3599,20 @@
           </a:ln>
         </p:spPr>
         <p:txBody>
-          <a:bodyPr xmlns:a="http://schemas.openxmlformats.org/drawingml/2006/main" lIns="0" tIns="0" rIns="0" bIns="0" anchor="ctr"/>
+          <a:bodyPr xmlns:a="http://schemas.openxmlformats.org/drawingml/2006/main" wrap="square" lIns="0" tIns="0" rIns="0" bIns="0" anchor="ctr">
+            <a:noAutofit/>
+          </a:bodyPr>
           <a:lstStyle xmlns:a="http://schemas.openxmlformats.org/drawingml/2006/main"/>
           <a:p xmlns:a="http://schemas.openxmlformats.org/drawingml/2006/main">
             <a:pPr>
+              <a:buNone/>
               <a:defRPr sz="2550" b="0">
                 <a:solidFill>
                   <a:srgbClr val="152B3A"/>
                 </a:solidFill>
+                <a:latin typeface="Arial"/>
+                <a:ea typeface="Arial"/>
+                <a:cs typeface="Arial"/>
               </a:defRPr>
             </a:pPr>
             <a:r>
@@ -3349,6 +3620,9 @@
                 <a:solidFill>
                   <a:srgbClr val="152B3A"/>
                 </a:solidFill>
+                <a:latin typeface="Arial"/>
+                <a:ea typeface="Arial"/>
+                <a:cs typeface="Arial"/>
               </a:rPr>
               <a:t>Find Monday’s food-job choices.</a:t>
             </a:r>
@@ -3371,8 +3645,8 @@
         </p:nvSpPr>
         <p:spPr>
           <a:xfrm xmlns:a="http://schemas.openxmlformats.org/drawingml/2006/main">
-            <a:off x="609600" y="3476625"/>
-            <a:ext cx="10972800" cy="781050"/>
+            <a:off x="609600" y="3352800"/>
+            <a:ext cx="10972800" cy="914400"/>
           </a:xfrm>
           <a:prstGeom xmlns:a="http://schemas.openxmlformats.org/drawingml/2006/main" prst="rect">
             <a:avLst/>
@@ -3384,14 +3658,20 @@
           </a:ln>
         </p:spPr>
         <p:txBody>
-          <a:bodyPr xmlns:a="http://schemas.openxmlformats.org/drawingml/2006/main" lIns="0" tIns="0" rIns="0" bIns="0" anchor="ctr"/>
+          <a:bodyPr xmlns:a="http://schemas.openxmlformats.org/drawingml/2006/main" wrap="square" lIns="0" tIns="0" rIns="0" bIns="0" anchor="ctr">
+            <a:noAutofit/>
+          </a:bodyPr>
           <a:lstStyle xmlns:a="http://schemas.openxmlformats.org/drawingml/2006/main"/>
           <a:p xmlns:a="http://schemas.openxmlformats.org/drawingml/2006/main">
             <a:pPr>
+              <a:buNone/>
               <a:defRPr sz="2550" b="0">
                 <a:solidFill>
                   <a:srgbClr val="152B3A"/>
                 </a:solidFill>
+                <a:latin typeface="Arial"/>
+                <a:ea typeface="Arial"/>
+                <a:cs typeface="Arial"/>
               </a:defRPr>
             </a:pPr>
             <a:r>
@@ -3399,6 +3679,9 @@
                 <a:solidFill>
                   <a:srgbClr val="152B3A"/>
                 </a:solidFill>
+                <a:latin typeface="Arial"/>
+                <a:ea typeface="Arial"/>
+                <a:cs typeface="Arial"/>
               </a:rPr>
               <a:t>Use the information table as evidence.</a:t>
             </a:r>
@@ -3421,8 +3704,8 @@
         </p:nvSpPr>
         <p:spPr>
           <a:xfrm xmlns:a="http://schemas.openxmlformats.org/drawingml/2006/main">
-            <a:off x="609600" y="4333875"/>
-            <a:ext cx="10972800" cy="781050"/>
+            <a:off x="609600" y="4400550"/>
+            <a:ext cx="10972800" cy="914400"/>
           </a:xfrm>
           <a:prstGeom xmlns:a="http://schemas.openxmlformats.org/drawingml/2006/main" prst="rect">
             <a:avLst/>
@@ -3434,21 +3717,30 @@
           </a:ln>
         </p:spPr>
         <p:txBody>
-          <a:bodyPr xmlns:a="http://schemas.openxmlformats.org/drawingml/2006/main" lIns="0" tIns="0" rIns="0" bIns="0" anchor="ctr"/>
+          <a:bodyPr xmlns:a="http://schemas.openxmlformats.org/drawingml/2006/main" wrap="square" lIns="0" tIns="0" rIns="0" bIns="0" anchor="ctr">
+            <a:noAutofit/>
+          </a:bodyPr>
           <a:lstStyle xmlns:a="http://schemas.openxmlformats.org/drawingml/2006/main"/>
           <a:p xmlns:a="http://schemas.openxmlformats.org/drawingml/2006/main">
             <a:pPr>
-              <a:defRPr sz="2550" b="0">
-                <a:solidFill>
-                  <a:srgbClr val="152B3A"/>
-                </a:solidFill>
+              <a:buNone/>
+              <a:defRPr sz="2550" b="1">
+                <a:solidFill>
+                  <a:srgbClr val="28685E"/>
+                </a:solidFill>
+                <a:latin typeface="Arial"/>
+                <a:ea typeface="Arial"/>
+                <a:cs typeface="Arial"/>
               </a:defRPr>
             </a:pPr>
             <a:r>
-              <a:rPr sz="2550" b="0">
-                <a:solidFill>
-                  <a:srgbClr val="152B3A"/>
-                </a:solidFill>
+              <a:rPr sz="2550" b="1">
+                <a:solidFill>
+                  <a:srgbClr val="28685E"/>
+                </a:solidFill>
+                <a:latin typeface="Arial"/>
+                <a:ea typeface="Arial"/>
+                <a:cs typeface="Arial"/>
               </a:rPr>
               <a:t>We use made-up menus, not personal meals.</a:t>
             </a:r>
@@ -3471,7 +3763,7 @@
     <p:bg>
       <p:bgPr>
         <a:solidFill xmlns:a="http://schemas.openxmlformats.org/drawingml/2006/main">
-          <a:srgbClr val="F5F1E8"/>
+          <a:srgbClr val="FBF9F3"/>
         </a:solidFill>
       </p:bgPr>
     </p:bg>
@@ -3500,8 +3792,8 @@
         </p:nvSpPr>
         <p:spPr>
           <a:xfrm xmlns:a="http://schemas.openxmlformats.org/drawingml/2006/main">
-            <a:off x="609600" y="552450"/>
-            <a:ext cx="781050" cy="57150"/>
+            <a:off x="609600" y="742950"/>
+            <a:ext cx="9906000" cy="38100"/>
           </a:xfrm>
           <a:prstGeom xmlns:a="http://schemas.openxmlformats.org/drawingml/2006/main" prst="rect">
             <a:avLst/>
@@ -3531,8 +3823,8 @@
         </p:nvSpPr>
         <p:spPr>
           <a:xfrm xmlns:a="http://schemas.openxmlformats.org/drawingml/2006/main">
-            <a:off x="609600" y="762000"/>
-            <a:ext cx="9334500" cy="285750"/>
+            <a:off x="609600" y="342900"/>
+            <a:ext cx="9334500" cy="266700"/>
           </a:xfrm>
           <a:prstGeom xmlns:a="http://schemas.openxmlformats.org/drawingml/2006/main" prst="rect">
             <a:avLst/>
@@ -3544,21 +3836,30 @@
           </a:ln>
         </p:spPr>
         <p:txBody>
-          <a:bodyPr xmlns:a="http://schemas.openxmlformats.org/drawingml/2006/main" lIns="0" tIns="0" rIns="0" bIns="0" anchor="ctr"/>
+          <a:bodyPr xmlns:a="http://schemas.openxmlformats.org/drawingml/2006/main" wrap="square" lIns="0" tIns="0" rIns="0" bIns="0" anchor="ctr">
+            <a:noAutofit/>
+          </a:bodyPr>
           <a:lstStyle xmlns:a="http://schemas.openxmlformats.org/drawingml/2006/main"/>
           <a:p xmlns:a="http://schemas.openxmlformats.org/drawingml/2006/main">
             <a:pPr>
-              <a:defRPr sz="1500" b="1">
+              <a:buNone/>
+              <a:defRPr sz="1425" b="1">
                 <a:solidFill>
                   <a:srgbClr val="28685E"/>
                 </a:solidFill>
+                <a:latin typeface="Arial"/>
+                <a:ea typeface="Arial"/>
+                <a:cs typeface="Arial"/>
               </a:defRPr>
             </a:pPr>
             <a:r>
-              <a:rPr sz="1500" b="1">
+              <a:rPr sz="1425" b="1">
                 <a:solidFill>
                   <a:srgbClr val="28685E"/>
                 </a:solidFill>
+                <a:latin typeface="Arial"/>
+                <a:ea typeface="Arial"/>
+                <a:cs typeface="Arial"/>
               </a:rPr>
               <a:t>MADE BY MATT  /  BUILD SCIENCE</a:t>
             </a:r>
@@ -3567,14 +3868,14 @@
       </p:sp>
       <p:pic>
         <p:nvPicPr>
-          <p:cNvPr id="13" name=""/>
+          <p:cNvPr id="17" name=""/>
           <p:cNvPicPr>
             <a:picLocks xmlns:a="http://schemas.openxmlformats.org/drawingml/2006/main" noChangeAspect="1"/>
           </p:cNvPicPr>
           <p:nvPr/>
         </p:nvPicPr>
         <p:blipFill>
-          <a:blip xmlns:r="http://schemas.openxmlformats.org/officeDocument/2006/relationships" xmlns:a="http://schemas.openxmlformats.org/drawingml/2006/main" r:embed="R7de53365c5774fc6"/>
+          <a:blip xmlns:r="http://schemas.openxmlformats.org/officeDocument/2006/relationships" xmlns:a="http://schemas.openxmlformats.org/drawingml/2006/main" r:embed="R0fe22c59cac44b7f"/>
           <a:stretch xmlns:a="http://schemas.openxmlformats.org/drawingml/2006/main"/>
         </p:blipFill>
         <p:spPr>
@@ -3603,8 +3904,8 @@
         </p:nvSpPr>
         <p:spPr>
           <a:xfrm xmlns:a="http://schemas.openxmlformats.org/drawingml/2006/main">
-            <a:off x="609600" y="1352550"/>
-            <a:ext cx="10972800" cy="952500"/>
+            <a:off x="609600" y="1047750"/>
+            <a:ext cx="10972800" cy="895350"/>
           </a:xfrm>
           <a:prstGeom xmlns:a="http://schemas.openxmlformats.org/drawingml/2006/main" prst="rect">
             <a:avLst/>
@@ -3616,21 +3917,30 @@
           </a:ln>
         </p:spPr>
         <p:txBody>
-          <a:bodyPr xmlns:a="http://schemas.openxmlformats.org/drawingml/2006/main" lIns="0" tIns="0" rIns="0" bIns="0" anchor="ctr"/>
+          <a:bodyPr xmlns:a="http://schemas.openxmlformats.org/drawingml/2006/main" wrap="square" lIns="0" tIns="0" rIns="0" bIns="0" anchor="ctr">
+            <a:noAutofit/>
+          </a:bodyPr>
           <a:lstStyle xmlns:a="http://schemas.openxmlformats.org/drawingml/2006/main"/>
           <a:p xmlns:a="http://schemas.openxmlformats.org/drawingml/2006/main">
             <a:pPr>
-              <a:defRPr sz="3750" b="1">
+              <a:buNone/>
+              <a:defRPr sz="3600" b="1">
                 <a:solidFill>
                   <a:srgbClr val="152B3A"/>
                 </a:solidFill>
+                <a:latin typeface="Arial"/>
+                <a:ea typeface="Arial"/>
+                <a:cs typeface="Arial"/>
               </a:defRPr>
             </a:pPr>
             <a:r>
-              <a:rPr sz="3750" b="1">
+              <a:rPr sz="3600" b="1">
                 <a:solidFill>
                   <a:srgbClr val="152B3A"/>
                 </a:solidFill>
+                <a:latin typeface="Arial"/>
+                <a:ea typeface="Arial"/>
+                <a:cs typeface="Arial"/>
               </a:rPr>
               <a:t>Case 1: only bread and water</a:t>
             </a:r>
@@ -3697,21 +4007,30 @@
           </a:ln>
         </p:spPr>
         <p:txBody>
-          <a:bodyPr xmlns:a="http://schemas.openxmlformats.org/drawingml/2006/main" lIns="0" tIns="0" rIns="0" bIns="0" anchor="ctr"/>
+          <a:bodyPr xmlns:a="http://schemas.openxmlformats.org/drawingml/2006/main" wrap="square" lIns="0" tIns="0" rIns="0" bIns="0" anchor="ctr">
+            <a:noAutofit/>
+          </a:bodyPr>
           <a:lstStyle xmlns:a="http://schemas.openxmlformats.org/drawingml/2006/main"/>
           <a:p xmlns:a="http://schemas.openxmlformats.org/drawingml/2006/main">
             <a:pPr>
-              <a:defRPr sz="1275" b="0">
+              <a:buNone/>
+              <a:defRPr sz="1200" b="0">
                 <a:solidFill>
                   <a:srgbClr val="50616B"/>
                 </a:solidFill>
+                <a:latin typeface="Arial"/>
+                <a:ea typeface="Arial"/>
+                <a:cs typeface="Arial"/>
               </a:defRPr>
             </a:pPr>
             <a:r>
-              <a:rPr sz="1275" b="0">
+              <a:rPr sz="1200" b="0">
                 <a:solidFill>
                   <a:srgbClr val="50616B"/>
                 </a:solidFill>
+                <a:latin typeface="Arial"/>
+                <a:ea typeface="Arial"/>
+                <a:cs typeface="Arial"/>
               </a:rPr>
               <a:t>AUTUMN 1  ·  WEEK 5  ·  LESSON B</a:t>
             </a:r>
@@ -3747,14 +4066,20 @@
           </a:ln>
         </p:spPr>
         <p:txBody>
-          <a:bodyPr xmlns:a="http://schemas.openxmlformats.org/drawingml/2006/main" lIns="0" tIns="0" rIns="0" bIns="0" anchor="ctr"/>
+          <a:bodyPr xmlns:a="http://schemas.openxmlformats.org/drawingml/2006/main" wrap="square" lIns="0" tIns="0" rIns="0" bIns="0" anchor="ctr">
+            <a:noAutofit/>
+          </a:bodyPr>
           <a:lstStyle xmlns:a="http://schemas.openxmlformats.org/drawingml/2006/main"/>
           <a:p xmlns:a="http://schemas.openxmlformats.org/drawingml/2006/main">
             <a:pPr>
+              <a:buNone/>
               <a:defRPr sz="1350" b="1">
                 <a:solidFill>
                   <a:srgbClr val="28685E"/>
                 </a:solidFill>
+                <a:latin typeface="Arial"/>
+                <a:ea typeface="Arial"/>
+                <a:cs typeface="Arial"/>
               </a:defRPr>
             </a:pPr>
             <a:r>
@@ -3762,6 +4087,9 @@
                 <a:solidFill>
                   <a:srgbClr val="28685E"/>
                 </a:solidFill>
+                <a:latin typeface="Arial"/>
+                <a:ea typeface="Arial"/>
+                <a:cs typeface="Arial"/>
               </a:rPr>
               <a:t>03</a:t>
             </a:r>
@@ -3784,8 +4112,8 @@
         </p:nvSpPr>
         <p:spPr>
           <a:xfrm xmlns:a="http://schemas.openxmlformats.org/drawingml/2006/main">
-            <a:off x="609600" y="2619375"/>
-            <a:ext cx="10972800" cy="781050"/>
+            <a:off x="609600" y="2305050"/>
+            <a:ext cx="7096125" cy="914400"/>
           </a:xfrm>
           <a:prstGeom xmlns:a="http://schemas.openxmlformats.org/drawingml/2006/main" prst="rect">
             <a:avLst/>
@@ -3797,14 +4125,20 @@
           </a:ln>
         </p:spPr>
         <p:txBody>
-          <a:bodyPr xmlns:a="http://schemas.openxmlformats.org/drawingml/2006/main" lIns="0" tIns="0" rIns="0" bIns="0" anchor="ctr"/>
+          <a:bodyPr xmlns:a="http://schemas.openxmlformats.org/drawingml/2006/main" wrap="square" lIns="0" tIns="0" rIns="0" bIns="0" anchor="ctr">
+            <a:noAutofit/>
+          </a:bodyPr>
           <a:lstStyle xmlns:a="http://schemas.openxmlformats.org/drawingml/2006/main"/>
           <a:p xmlns:a="http://schemas.openxmlformats.org/drawingml/2006/main">
             <a:pPr>
+              <a:buNone/>
               <a:defRPr sz="2550" b="0">
                 <a:solidFill>
                   <a:srgbClr val="152B3A"/>
                 </a:solidFill>
+                <a:latin typeface="Arial"/>
+                <a:ea typeface="Arial"/>
+                <a:cs typeface="Arial"/>
               </a:defRPr>
             </a:pPr>
             <a:r>
@@ -3812,6 +4146,9 @@
                 <a:solidFill>
                   <a:srgbClr val="152B3A"/>
                 </a:solidFill>
+                <a:latin typeface="Arial"/>
+                <a:ea typeface="Arial"/>
+                <a:cs typeface="Arial"/>
               </a:rPr>
               <a:t>Keep the bread and water cards.</a:t>
             </a:r>
@@ -3834,8 +4171,8 @@
         </p:nvSpPr>
         <p:spPr>
           <a:xfrm xmlns:a="http://schemas.openxmlformats.org/drawingml/2006/main">
-            <a:off x="609600" y="3476625"/>
-            <a:ext cx="10972800" cy="781050"/>
+            <a:off x="609600" y="3352800"/>
+            <a:ext cx="7096125" cy="914400"/>
           </a:xfrm>
           <a:prstGeom xmlns:a="http://schemas.openxmlformats.org/drawingml/2006/main" prst="rect">
             <a:avLst/>
@@ -3847,14 +4184,20 @@
           </a:ln>
         </p:spPr>
         <p:txBody>
-          <a:bodyPr xmlns:a="http://schemas.openxmlformats.org/drawingml/2006/main" lIns="0" tIns="0" rIns="0" bIns="0" anchor="ctr"/>
+          <a:bodyPr xmlns:a="http://schemas.openxmlformats.org/drawingml/2006/main" wrap="square" lIns="0" tIns="0" rIns="0" bIns="0" anchor="ctr">
+            <a:noAutofit/>
+          </a:bodyPr>
           <a:lstStyle xmlns:a="http://schemas.openxmlformats.org/drawingml/2006/main"/>
           <a:p xmlns:a="http://schemas.openxmlformats.org/drawingml/2006/main">
             <a:pPr>
+              <a:buNone/>
               <a:defRPr sz="2550" b="0">
                 <a:solidFill>
                   <a:srgbClr val="152B3A"/>
                 </a:solidFill>
+                <a:latin typeface="Arial"/>
+                <a:ea typeface="Arial"/>
+                <a:cs typeface="Arial"/>
               </a:defRPr>
             </a:pPr>
             <a:r>
@@ -3862,6 +4205,9 @@
                 <a:solidFill>
                   <a:srgbClr val="152B3A"/>
                 </a:solidFill>
+                <a:latin typeface="Arial"/>
+                <a:ea typeface="Arial"/>
+                <a:cs typeface="Arial"/>
               </a:rPr>
               <a:t>What jobs do they help with?</a:t>
             </a:r>
@@ -3884,8 +4230,8 @@
         </p:nvSpPr>
         <p:spPr>
           <a:xfrm xmlns:a="http://schemas.openxmlformats.org/drawingml/2006/main">
-            <a:off x="609600" y="4333875"/>
-            <a:ext cx="10972800" cy="781050"/>
+            <a:off x="609600" y="4400550"/>
+            <a:ext cx="7096125" cy="914400"/>
           </a:xfrm>
           <a:prstGeom xmlns:a="http://schemas.openxmlformats.org/drawingml/2006/main" prst="rect">
             <a:avLst/>
@@ -3897,27 +4243,80 @@
           </a:ln>
         </p:spPr>
         <p:txBody>
-          <a:bodyPr xmlns:a="http://schemas.openxmlformats.org/drawingml/2006/main" lIns="0" tIns="0" rIns="0" bIns="0" anchor="ctr"/>
+          <a:bodyPr xmlns:a="http://schemas.openxmlformats.org/drawingml/2006/main" wrap="square" lIns="0" tIns="0" rIns="0" bIns="0" anchor="ctr">
+            <a:noAutofit/>
+          </a:bodyPr>
           <a:lstStyle xmlns:a="http://schemas.openxmlformats.org/drawingml/2006/main"/>
           <a:p xmlns:a="http://schemas.openxmlformats.org/drawingml/2006/main">
             <a:pPr>
-              <a:defRPr sz="2550" b="0">
-                <a:solidFill>
-                  <a:srgbClr val="152B3A"/>
-                </a:solidFill>
+              <a:buNone/>
+              <a:defRPr sz="2550" b="1">
+                <a:solidFill>
+                  <a:srgbClr val="28685E"/>
+                </a:solidFill>
+                <a:latin typeface="Arial"/>
+                <a:ea typeface="Arial"/>
+                <a:cs typeface="Arial"/>
               </a:defRPr>
             </a:pPr>
             <a:r>
-              <a:rPr sz="2550" b="0">
-                <a:solidFill>
-                  <a:srgbClr val="152B3A"/>
-                </a:solidFill>
+              <a:rPr sz="2550" b="1">
+                <a:solidFill>
+                  <a:srgbClr val="28685E"/>
+                </a:solidFill>
+                <a:latin typeface="Arial"/>
+                <a:ea typeface="Arial"/>
+                <a:cs typeface="Arial"/>
               </a:rPr>
               <a:t>Which body needs are not well represented?</a:t>
             </a:r>
           </a:p>
         </p:txBody>
       </p:sp>
+      <p:pic>
+        <p:nvPicPr>
+          <p:cNvPr id="25" name=""/>
+          <p:cNvPicPr>
+            <a:picLocks xmlns:a="http://schemas.openxmlformats.org/drawingml/2006/main" noChangeAspect="1"/>
+          </p:cNvPicPr>
+          <p:nvPr/>
+        </p:nvPicPr>
+        <p:blipFill>
+          <a:blip xmlns:r="http://schemas.openxmlformats.org/officeDocument/2006/relationships" xmlns:a="http://schemas.openxmlformats.org/drawingml/2006/main" r:embed="R73904293f2704684"/>
+          <a:stretch xmlns:a="http://schemas.openxmlformats.org/drawingml/2006/main"/>
+        </p:blipFill>
+        <p:spPr>
+          <a:xfrm xmlns:a="http://schemas.openxmlformats.org/drawingml/2006/main">
+            <a:off x="9226762" y="2381250"/>
+            <a:ext cx="1263227" cy="1524000"/>
+          </a:xfrm>
+          <a:prstGeom xmlns:a="http://schemas.openxmlformats.org/drawingml/2006/main" prst="rect">
+            <a:avLst/>
+          </a:prstGeom>
+        </p:spPr>
+      </p:pic>
+      <p:pic>
+        <p:nvPicPr>
+          <p:cNvPr id="26" name=""/>
+          <p:cNvPicPr>
+            <a:picLocks xmlns:a="http://schemas.openxmlformats.org/drawingml/2006/main" noChangeAspect="1"/>
+          </p:cNvPicPr>
+          <p:nvPr/>
+        </p:nvPicPr>
+        <p:blipFill>
+          <a:blip xmlns:r="http://schemas.openxmlformats.org/officeDocument/2006/relationships" xmlns:a="http://schemas.openxmlformats.org/drawingml/2006/main" r:embed="Rd1e94438be314789"/>
+          <a:stretch xmlns:a="http://schemas.openxmlformats.org/drawingml/2006/main"/>
+        </p:blipFill>
+        <p:spPr>
+          <a:xfrm xmlns:a="http://schemas.openxmlformats.org/drawingml/2006/main">
+            <a:off x="9306348" y="4095750"/>
+            <a:ext cx="1104053" cy="1524000"/>
+          </a:xfrm>
+          <a:prstGeom xmlns:a="http://schemas.openxmlformats.org/drawingml/2006/main" prst="rect">
+            <a:avLst/>
+          </a:prstGeom>
+        </p:spPr>
+      </p:pic>
     </p:spTree>
     <p:extLst>
       <p:ext uri="{BB962C8B-B14F-4D97-AF65-F5344CB8AC3E}">
@@ -3934,7 +4333,7 @@
     <p:bg>
       <p:bgPr>
         <a:solidFill xmlns:a="http://schemas.openxmlformats.org/drawingml/2006/main">
-          <a:srgbClr val="F5F1E8"/>
+          <a:srgbClr val="FBF9F3"/>
         </a:solidFill>
       </p:bgPr>
     </p:bg>
@@ -3963,8 +4362,8 @@
         </p:nvSpPr>
         <p:spPr>
           <a:xfrm xmlns:a="http://schemas.openxmlformats.org/drawingml/2006/main">
-            <a:off x="609600" y="552450"/>
-            <a:ext cx="781050" cy="57150"/>
+            <a:off x="609600" y="742950"/>
+            <a:ext cx="9906000" cy="38100"/>
           </a:xfrm>
           <a:prstGeom xmlns:a="http://schemas.openxmlformats.org/drawingml/2006/main" prst="rect">
             <a:avLst/>
@@ -3994,8 +4393,8 @@
         </p:nvSpPr>
         <p:spPr>
           <a:xfrm xmlns:a="http://schemas.openxmlformats.org/drawingml/2006/main">
-            <a:off x="609600" y="762000"/>
-            <a:ext cx="9334500" cy="285750"/>
+            <a:off x="609600" y="342900"/>
+            <a:ext cx="9334500" cy="266700"/>
           </a:xfrm>
           <a:prstGeom xmlns:a="http://schemas.openxmlformats.org/drawingml/2006/main" prst="rect">
             <a:avLst/>
@@ -4007,21 +4406,30 @@
           </a:ln>
         </p:spPr>
         <p:txBody>
-          <a:bodyPr xmlns:a="http://schemas.openxmlformats.org/drawingml/2006/main" lIns="0" tIns="0" rIns="0" bIns="0" anchor="ctr"/>
+          <a:bodyPr xmlns:a="http://schemas.openxmlformats.org/drawingml/2006/main" wrap="square" lIns="0" tIns="0" rIns="0" bIns="0" anchor="ctr">
+            <a:noAutofit/>
+          </a:bodyPr>
           <a:lstStyle xmlns:a="http://schemas.openxmlformats.org/drawingml/2006/main"/>
           <a:p xmlns:a="http://schemas.openxmlformats.org/drawingml/2006/main">
             <a:pPr>
-              <a:defRPr sz="1500" b="1">
+              <a:buNone/>
+              <a:defRPr sz="1425" b="1">
                 <a:solidFill>
                   <a:srgbClr val="28685E"/>
                 </a:solidFill>
+                <a:latin typeface="Arial"/>
+                <a:ea typeface="Arial"/>
+                <a:cs typeface="Arial"/>
               </a:defRPr>
             </a:pPr>
             <a:r>
-              <a:rPr sz="1500" b="1">
+              <a:rPr sz="1425" b="1">
                 <a:solidFill>
                   <a:srgbClr val="28685E"/>
                 </a:solidFill>
+                <a:latin typeface="Arial"/>
+                <a:ea typeface="Arial"/>
+                <a:cs typeface="Arial"/>
               </a:rPr>
               <a:t>MADE BY MATT  /  BUILD SCIENCE</a:t>
             </a:r>
@@ -4030,14 +4438,14 @@
       </p:sp>
       <p:pic>
         <p:nvPicPr>
-          <p:cNvPr id="13" name=""/>
+          <p:cNvPr id="17" name=""/>
           <p:cNvPicPr>
             <a:picLocks xmlns:a="http://schemas.openxmlformats.org/drawingml/2006/main" noChangeAspect="1"/>
           </p:cNvPicPr>
           <p:nvPr/>
         </p:nvPicPr>
         <p:blipFill>
-          <a:blip xmlns:r="http://schemas.openxmlformats.org/officeDocument/2006/relationships" xmlns:a="http://schemas.openxmlformats.org/drawingml/2006/main" r:embed="R2f16567737a54b7f"/>
+          <a:blip xmlns:r="http://schemas.openxmlformats.org/officeDocument/2006/relationships" xmlns:a="http://schemas.openxmlformats.org/drawingml/2006/main" r:embed="Rdb3955eb2db04090"/>
           <a:stretch xmlns:a="http://schemas.openxmlformats.org/drawingml/2006/main"/>
         </p:blipFill>
         <p:spPr>
@@ -4066,8 +4474,8 @@
         </p:nvSpPr>
         <p:spPr>
           <a:xfrm xmlns:a="http://schemas.openxmlformats.org/drawingml/2006/main">
-            <a:off x="609600" y="1352550"/>
-            <a:ext cx="10972800" cy="952500"/>
+            <a:off x="609600" y="1047750"/>
+            <a:ext cx="10972800" cy="895350"/>
           </a:xfrm>
           <a:prstGeom xmlns:a="http://schemas.openxmlformats.org/drawingml/2006/main" prst="rect">
             <a:avLst/>
@@ -4079,21 +4487,30 @@
           </a:ln>
         </p:spPr>
         <p:txBody>
-          <a:bodyPr xmlns:a="http://schemas.openxmlformats.org/drawingml/2006/main" lIns="0" tIns="0" rIns="0" bIns="0" anchor="ctr"/>
+          <a:bodyPr xmlns:a="http://schemas.openxmlformats.org/drawingml/2006/main" wrap="square" lIns="0" tIns="0" rIns="0" bIns="0" anchor="ctr">
+            <a:noAutofit/>
+          </a:bodyPr>
           <a:lstStyle xmlns:a="http://schemas.openxmlformats.org/drawingml/2006/main"/>
           <a:p xmlns:a="http://schemas.openxmlformats.org/drawingml/2006/main">
             <a:pPr>
-              <a:defRPr sz="3750" b="1">
+              <a:buNone/>
+              <a:defRPr sz="3600" b="1">
                 <a:solidFill>
                   <a:srgbClr val="152B3A"/>
                 </a:solidFill>
+                <a:latin typeface="Arial"/>
+                <a:ea typeface="Arial"/>
+                <a:cs typeface="Arial"/>
               </a:defRPr>
             </a:pPr>
             <a:r>
-              <a:rPr sz="3750" b="1">
+              <a:rPr sz="3600" b="1">
                 <a:solidFill>
                   <a:srgbClr val="152B3A"/>
                 </a:solidFill>
+                <a:latin typeface="Arial"/>
+                <a:ea typeface="Arial"/>
+                <a:cs typeface="Arial"/>
               </a:rPr>
               <a:t>Add variety and give evidence</a:t>
             </a:r>
@@ -4160,21 +4577,30 @@
           </a:ln>
         </p:spPr>
         <p:txBody>
-          <a:bodyPr xmlns:a="http://schemas.openxmlformats.org/drawingml/2006/main" lIns="0" tIns="0" rIns="0" bIns="0" anchor="ctr"/>
+          <a:bodyPr xmlns:a="http://schemas.openxmlformats.org/drawingml/2006/main" wrap="square" lIns="0" tIns="0" rIns="0" bIns="0" anchor="ctr">
+            <a:noAutofit/>
+          </a:bodyPr>
           <a:lstStyle xmlns:a="http://schemas.openxmlformats.org/drawingml/2006/main"/>
           <a:p xmlns:a="http://schemas.openxmlformats.org/drawingml/2006/main">
             <a:pPr>
-              <a:defRPr sz="1275" b="0">
+              <a:buNone/>
+              <a:defRPr sz="1200" b="0">
                 <a:solidFill>
                   <a:srgbClr val="50616B"/>
                 </a:solidFill>
+                <a:latin typeface="Arial"/>
+                <a:ea typeface="Arial"/>
+                <a:cs typeface="Arial"/>
               </a:defRPr>
             </a:pPr>
             <a:r>
-              <a:rPr sz="1275" b="0">
+              <a:rPr sz="1200" b="0">
                 <a:solidFill>
                   <a:srgbClr val="50616B"/>
                 </a:solidFill>
+                <a:latin typeface="Arial"/>
+                <a:ea typeface="Arial"/>
+                <a:cs typeface="Arial"/>
               </a:rPr>
               <a:t>AUTUMN 1  ·  WEEK 5  ·  LESSON B</a:t>
             </a:r>
@@ -4210,14 +4636,20 @@
           </a:ln>
         </p:spPr>
         <p:txBody>
-          <a:bodyPr xmlns:a="http://schemas.openxmlformats.org/drawingml/2006/main" lIns="0" tIns="0" rIns="0" bIns="0" anchor="ctr"/>
+          <a:bodyPr xmlns:a="http://schemas.openxmlformats.org/drawingml/2006/main" wrap="square" lIns="0" tIns="0" rIns="0" bIns="0" anchor="ctr">
+            <a:noAutofit/>
+          </a:bodyPr>
           <a:lstStyle xmlns:a="http://schemas.openxmlformats.org/drawingml/2006/main"/>
           <a:p xmlns:a="http://schemas.openxmlformats.org/drawingml/2006/main">
             <a:pPr>
+              <a:buNone/>
               <a:defRPr sz="1350" b="1">
                 <a:solidFill>
                   <a:srgbClr val="28685E"/>
                 </a:solidFill>
+                <a:latin typeface="Arial"/>
+                <a:ea typeface="Arial"/>
+                <a:cs typeface="Arial"/>
               </a:defRPr>
             </a:pPr>
             <a:r>
@@ -4225,6 +4657,9 @@
                 <a:solidFill>
                   <a:srgbClr val="28685E"/>
                 </a:solidFill>
+                <a:latin typeface="Arial"/>
+                <a:ea typeface="Arial"/>
+                <a:cs typeface="Arial"/>
               </a:rPr>
               <a:t>04</a:t>
             </a:r>
@@ -4247,8 +4682,8 @@
         </p:nvSpPr>
         <p:spPr>
           <a:xfrm xmlns:a="http://schemas.openxmlformats.org/drawingml/2006/main">
-            <a:off x="609600" y="2619375"/>
-            <a:ext cx="10972800" cy="781050"/>
+            <a:off x="609600" y="2305050"/>
+            <a:ext cx="7096125" cy="914400"/>
           </a:xfrm>
           <a:prstGeom xmlns:a="http://schemas.openxmlformats.org/drawingml/2006/main" prst="rect">
             <a:avLst/>
@@ -4260,14 +4695,20 @@
           </a:ln>
         </p:spPr>
         <p:txBody>
-          <a:bodyPr xmlns:a="http://schemas.openxmlformats.org/drawingml/2006/main" lIns="0" tIns="0" rIns="0" bIns="0" anchor="ctr"/>
+          <a:bodyPr xmlns:a="http://schemas.openxmlformats.org/drawingml/2006/main" wrap="square" lIns="0" tIns="0" rIns="0" bIns="0" anchor="ctr">
+            <a:noAutofit/>
+          </a:bodyPr>
           <a:lstStyle xmlns:a="http://schemas.openxmlformats.org/drawingml/2006/main"/>
           <a:p xmlns:a="http://schemas.openxmlformats.org/drawingml/2006/main">
             <a:pPr>
+              <a:buNone/>
               <a:defRPr sz="2550" b="0">
                 <a:solidFill>
                   <a:srgbClr val="152B3A"/>
                 </a:solidFill>
+                <a:latin typeface="Arial"/>
+                <a:ea typeface="Arial"/>
+                <a:cs typeface="Arial"/>
               </a:defRPr>
             </a:pPr>
             <a:r>
@@ -4275,6 +4716,9 @@
                 <a:solidFill>
                   <a:srgbClr val="152B3A"/>
                 </a:solidFill>
+                <a:latin typeface="Arial"/>
+                <a:ea typeface="Arial"/>
+                <a:cs typeface="Arial"/>
               </a:rPr>
               <a:t>Add a source of protein.</a:t>
             </a:r>
@@ -4297,8 +4741,8 @@
         </p:nvSpPr>
         <p:spPr>
           <a:xfrm xmlns:a="http://schemas.openxmlformats.org/drawingml/2006/main">
-            <a:off x="609600" y="3476625"/>
-            <a:ext cx="10972800" cy="781050"/>
+            <a:off x="609600" y="3352800"/>
+            <a:ext cx="7096125" cy="914400"/>
           </a:xfrm>
           <a:prstGeom xmlns:a="http://schemas.openxmlformats.org/drawingml/2006/main" prst="rect">
             <a:avLst/>
@@ -4310,14 +4754,20 @@
           </a:ln>
         </p:spPr>
         <p:txBody>
-          <a:bodyPr xmlns:a="http://schemas.openxmlformats.org/drawingml/2006/main" lIns="0" tIns="0" rIns="0" bIns="0" anchor="ctr"/>
+          <a:bodyPr xmlns:a="http://schemas.openxmlformats.org/drawingml/2006/main" wrap="square" lIns="0" tIns="0" rIns="0" bIns="0" anchor="ctr">
+            <a:noAutofit/>
+          </a:bodyPr>
           <a:lstStyle xmlns:a="http://schemas.openxmlformats.org/drawingml/2006/main"/>
           <a:p xmlns:a="http://schemas.openxmlformats.org/drawingml/2006/main">
             <a:pPr>
+              <a:buNone/>
               <a:defRPr sz="2550" b="0">
                 <a:solidFill>
                   <a:srgbClr val="152B3A"/>
                 </a:solidFill>
+                <a:latin typeface="Arial"/>
+                <a:ea typeface="Arial"/>
+                <a:cs typeface="Arial"/>
               </a:defRPr>
             </a:pPr>
             <a:r>
@@ -4325,6 +4775,9 @@
                 <a:solidFill>
                   <a:srgbClr val="152B3A"/>
                 </a:solidFill>
+                <a:latin typeface="Arial"/>
+                <a:ea typeface="Arial"/>
+                <a:cs typeface="Arial"/>
               </a:rPr>
               <a:t>Add fruit or vegetables.</a:t>
             </a:r>
@@ -4347,8 +4800,8 @@
         </p:nvSpPr>
         <p:spPr>
           <a:xfrm xmlns:a="http://schemas.openxmlformats.org/drawingml/2006/main">
-            <a:off x="609600" y="4333875"/>
-            <a:ext cx="10972800" cy="781050"/>
+            <a:off x="609600" y="4400550"/>
+            <a:ext cx="7096125" cy="914400"/>
           </a:xfrm>
           <a:prstGeom xmlns:a="http://schemas.openxmlformats.org/drawingml/2006/main" prst="rect">
             <a:avLst/>
@@ -4360,27 +4813,80 @@
           </a:ln>
         </p:spPr>
         <p:txBody>
-          <a:bodyPr xmlns:a="http://schemas.openxmlformats.org/drawingml/2006/main" lIns="0" tIns="0" rIns="0" bIns="0" anchor="ctr"/>
+          <a:bodyPr xmlns:a="http://schemas.openxmlformats.org/drawingml/2006/main" wrap="square" lIns="0" tIns="0" rIns="0" bIns="0" anchor="ctr">
+            <a:noAutofit/>
+          </a:bodyPr>
           <a:lstStyle xmlns:a="http://schemas.openxmlformats.org/drawingml/2006/main"/>
           <a:p xmlns:a="http://schemas.openxmlformats.org/drawingml/2006/main">
             <a:pPr>
-              <a:defRPr sz="2550" b="0">
-                <a:solidFill>
-                  <a:srgbClr val="152B3A"/>
-                </a:solidFill>
+              <a:buNone/>
+              <a:defRPr sz="2550" b="1">
+                <a:solidFill>
+                  <a:srgbClr val="28685E"/>
+                </a:solidFill>
+                <a:latin typeface="Arial"/>
+                <a:ea typeface="Arial"/>
+                <a:cs typeface="Arial"/>
               </a:defRPr>
             </a:pPr>
             <a:r>
-              <a:rPr sz="2550" b="0">
-                <a:solidFill>
-                  <a:srgbClr val="152B3A"/>
-                </a:solidFill>
+              <a:rPr sz="2550" b="1">
+                <a:solidFill>
+                  <a:srgbClr val="28685E"/>
+                </a:solidFill>
+                <a:latin typeface="Arial"/>
+                <a:ea typeface="Arial"/>
+                <a:cs typeface="Arial"/>
               </a:rPr>
               <a:t>Explain what each addition can provide.</a:t>
             </a:r>
           </a:p>
         </p:txBody>
       </p:sp>
+      <p:pic>
+        <p:nvPicPr>
+          <p:cNvPr id="25" name=""/>
+          <p:cNvPicPr>
+            <a:picLocks xmlns:a="http://schemas.openxmlformats.org/drawingml/2006/main" noChangeAspect="1"/>
+          </p:cNvPicPr>
+          <p:nvPr/>
+        </p:nvPicPr>
+        <p:blipFill>
+          <a:blip xmlns:r="http://schemas.openxmlformats.org/officeDocument/2006/relationships" xmlns:a="http://schemas.openxmlformats.org/drawingml/2006/main" r:embed="R96105565e62b44b2"/>
+          <a:stretch xmlns:a="http://schemas.openxmlformats.org/drawingml/2006/main"/>
+        </p:blipFill>
+        <p:spPr>
+          <a:xfrm xmlns:a="http://schemas.openxmlformats.org/drawingml/2006/main">
+            <a:off x="9275868" y="2381250"/>
+            <a:ext cx="1165013" cy="1524000"/>
+          </a:xfrm>
+          <a:prstGeom xmlns:a="http://schemas.openxmlformats.org/drawingml/2006/main" prst="rect">
+            <a:avLst/>
+          </a:prstGeom>
+        </p:spPr>
+      </p:pic>
+      <p:pic>
+        <p:nvPicPr>
+          <p:cNvPr id="26" name=""/>
+          <p:cNvPicPr>
+            <a:picLocks xmlns:a="http://schemas.openxmlformats.org/drawingml/2006/main" noChangeAspect="1"/>
+          </p:cNvPicPr>
+          <p:nvPr/>
+        </p:nvPicPr>
+        <p:blipFill>
+          <a:blip xmlns:r="http://schemas.openxmlformats.org/officeDocument/2006/relationships" xmlns:a="http://schemas.openxmlformats.org/drawingml/2006/main" r:embed="Rff4a5ce3243a4995"/>
+          <a:stretch xmlns:a="http://schemas.openxmlformats.org/drawingml/2006/main"/>
+        </p:blipFill>
+        <p:spPr>
+          <a:xfrm xmlns:a="http://schemas.openxmlformats.org/drawingml/2006/main">
+            <a:off x="8663081" y="4095750"/>
+            <a:ext cx="2390588" cy="1524000"/>
+          </a:xfrm>
+          <a:prstGeom xmlns:a="http://schemas.openxmlformats.org/drawingml/2006/main" prst="rect">
+            <a:avLst/>
+          </a:prstGeom>
+        </p:spPr>
+      </p:pic>
     </p:spTree>
     <p:extLst>
       <p:ext uri="{BB962C8B-B14F-4D97-AF65-F5344CB8AC3E}">
@@ -4397,7 +4903,7 @@
     <p:bg>
       <p:bgPr>
         <a:solidFill xmlns:a="http://schemas.openxmlformats.org/drawingml/2006/main">
-          <a:srgbClr val="F5F1E8"/>
+          <a:srgbClr val="FBF9F3"/>
         </a:solidFill>
       </p:bgPr>
     </p:bg>
@@ -4426,8 +4932,8 @@
         </p:nvSpPr>
         <p:spPr>
           <a:xfrm xmlns:a="http://schemas.openxmlformats.org/drawingml/2006/main">
-            <a:off x="609600" y="552450"/>
-            <a:ext cx="781050" cy="57150"/>
+            <a:off x="609600" y="742950"/>
+            <a:ext cx="9906000" cy="38100"/>
           </a:xfrm>
           <a:prstGeom xmlns:a="http://schemas.openxmlformats.org/drawingml/2006/main" prst="rect">
             <a:avLst/>
@@ -4457,8 +4963,8 @@
         </p:nvSpPr>
         <p:spPr>
           <a:xfrm xmlns:a="http://schemas.openxmlformats.org/drawingml/2006/main">
-            <a:off x="609600" y="762000"/>
-            <a:ext cx="9334500" cy="285750"/>
+            <a:off x="609600" y="342900"/>
+            <a:ext cx="9334500" cy="266700"/>
           </a:xfrm>
           <a:prstGeom xmlns:a="http://schemas.openxmlformats.org/drawingml/2006/main" prst="rect">
             <a:avLst/>
@@ -4470,21 +4976,30 @@
           </a:ln>
         </p:spPr>
         <p:txBody>
-          <a:bodyPr xmlns:a="http://schemas.openxmlformats.org/drawingml/2006/main" lIns="0" tIns="0" rIns="0" bIns="0" anchor="ctr"/>
+          <a:bodyPr xmlns:a="http://schemas.openxmlformats.org/drawingml/2006/main" wrap="square" lIns="0" tIns="0" rIns="0" bIns="0" anchor="ctr">
+            <a:noAutofit/>
+          </a:bodyPr>
           <a:lstStyle xmlns:a="http://schemas.openxmlformats.org/drawingml/2006/main"/>
           <a:p xmlns:a="http://schemas.openxmlformats.org/drawingml/2006/main">
             <a:pPr>
-              <a:defRPr sz="1500" b="1">
+              <a:buNone/>
+              <a:defRPr sz="1425" b="1">
                 <a:solidFill>
                   <a:srgbClr val="28685E"/>
                 </a:solidFill>
+                <a:latin typeface="Arial"/>
+                <a:ea typeface="Arial"/>
+                <a:cs typeface="Arial"/>
               </a:defRPr>
             </a:pPr>
             <a:r>
-              <a:rPr sz="1500" b="1">
+              <a:rPr sz="1425" b="1">
                 <a:solidFill>
                   <a:srgbClr val="28685E"/>
                 </a:solidFill>
+                <a:latin typeface="Arial"/>
+                <a:ea typeface="Arial"/>
+                <a:cs typeface="Arial"/>
               </a:rPr>
               <a:t>MADE BY MATT  /  BUILD SCIENCE</a:t>
             </a:r>
@@ -4493,14 +5008,14 @@
       </p:sp>
       <p:pic>
         <p:nvPicPr>
-          <p:cNvPr id="13" name=""/>
+          <p:cNvPr id="16" name=""/>
           <p:cNvPicPr>
             <a:picLocks xmlns:a="http://schemas.openxmlformats.org/drawingml/2006/main" noChangeAspect="1"/>
           </p:cNvPicPr>
           <p:nvPr/>
         </p:nvPicPr>
         <p:blipFill>
-          <a:blip xmlns:r="http://schemas.openxmlformats.org/officeDocument/2006/relationships" xmlns:a="http://schemas.openxmlformats.org/drawingml/2006/main" r:embed="Rb385f3e0a28a44ba"/>
+          <a:blip xmlns:r="http://schemas.openxmlformats.org/officeDocument/2006/relationships" xmlns:a="http://schemas.openxmlformats.org/drawingml/2006/main" r:embed="R574ee834253049b9"/>
           <a:stretch xmlns:a="http://schemas.openxmlformats.org/drawingml/2006/main"/>
         </p:blipFill>
         <p:spPr>
@@ -4529,8 +5044,8 @@
         </p:nvSpPr>
         <p:spPr>
           <a:xfrm xmlns:a="http://schemas.openxmlformats.org/drawingml/2006/main">
-            <a:off x="609600" y="1352550"/>
-            <a:ext cx="10972800" cy="952500"/>
+            <a:off x="609600" y="1047750"/>
+            <a:ext cx="10972800" cy="895350"/>
           </a:xfrm>
           <a:prstGeom xmlns:a="http://schemas.openxmlformats.org/drawingml/2006/main" prst="rect">
             <a:avLst/>
@@ -4542,21 +5057,30 @@
           </a:ln>
         </p:spPr>
         <p:txBody>
-          <a:bodyPr xmlns:a="http://schemas.openxmlformats.org/drawingml/2006/main" lIns="0" tIns="0" rIns="0" bIns="0" anchor="ctr"/>
+          <a:bodyPr xmlns:a="http://schemas.openxmlformats.org/drawingml/2006/main" wrap="square" lIns="0" tIns="0" rIns="0" bIns="0" anchor="ctr">
+            <a:noAutofit/>
+          </a:bodyPr>
           <a:lstStyle xmlns:a="http://schemas.openxmlformats.org/drawingml/2006/main"/>
           <a:p xmlns:a="http://schemas.openxmlformats.org/drawingml/2006/main">
             <a:pPr>
-              <a:defRPr sz="3750" b="1">
+              <a:buNone/>
+              <a:defRPr sz="3600" b="1">
                 <a:solidFill>
                   <a:srgbClr val="152B3A"/>
                 </a:solidFill>
+                <a:latin typeface="Arial"/>
+                <a:ea typeface="Arial"/>
+                <a:cs typeface="Arial"/>
               </a:defRPr>
             </a:pPr>
             <a:r>
-              <a:rPr sz="3750" b="1">
+              <a:rPr sz="3600" b="1">
                 <a:solidFill>
                   <a:srgbClr val="152B3A"/>
                 </a:solidFill>
+                <a:latin typeface="Arial"/>
+                <a:ea typeface="Arial"/>
+                <a:cs typeface="Arial"/>
               </a:rPr>
               <a:t>Case 2: change the protein source</a:t>
             </a:r>
@@ -4623,21 +5147,30 @@
           </a:ln>
         </p:spPr>
         <p:txBody>
-          <a:bodyPr xmlns:a="http://schemas.openxmlformats.org/drawingml/2006/main" lIns="0" tIns="0" rIns="0" bIns="0" anchor="ctr"/>
+          <a:bodyPr xmlns:a="http://schemas.openxmlformats.org/drawingml/2006/main" wrap="square" lIns="0" tIns="0" rIns="0" bIns="0" anchor="ctr">
+            <a:noAutofit/>
+          </a:bodyPr>
           <a:lstStyle xmlns:a="http://schemas.openxmlformats.org/drawingml/2006/main"/>
           <a:p xmlns:a="http://schemas.openxmlformats.org/drawingml/2006/main">
             <a:pPr>
-              <a:defRPr sz="1275" b="0">
+              <a:buNone/>
+              <a:defRPr sz="1200" b="0">
                 <a:solidFill>
                   <a:srgbClr val="50616B"/>
                 </a:solidFill>
+                <a:latin typeface="Arial"/>
+                <a:ea typeface="Arial"/>
+                <a:cs typeface="Arial"/>
               </a:defRPr>
             </a:pPr>
             <a:r>
-              <a:rPr sz="1275" b="0">
+              <a:rPr sz="1200" b="0">
                 <a:solidFill>
                   <a:srgbClr val="50616B"/>
                 </a:solidFill>
+                <a:latin typeface="Arial"/>
+                <a:ea typeface="Arial"/>
+                <a:cs typeface="Arial"/>
               </a:rPr>
               <a:t>AUTUMN 1  ·  WEEK 5  ·  LESSON B</a:t>
             </a:r>
@@ -4673,14 +5206,20 @@
           </a:ln>
         </p:spPr>
         <p:txBody>
-          <a:bodyPr xmlns:a="http://schemas.openxmlformats.org/drawingml/2006/main" lIns="0" tIns="0" rIns="0" bIns="0" anchor="ctr"/>
+          <a:bodyPr xmlns:a="http://schemas.openxmlformats.org/drawingml/2006/main" wrap="square" lIns="0" tIns="0" rIns="0" bIns="0" anchor="ctr">
+            <a:noAutofit/>
+          </a:bodyPr>
           <a:lstStyle xmlns:a="http://schemas.openxmlformats.org/drawingml/2006/main"/>
           <a:p xmlns:a="http://schemas.openxmlformats.org/drawingml/2006/main">
             <a:pPr>
+              <a:buNone/>
               <a:defRPr sz="1350" b="1">
                 <a:solidFill>
                   <a:srgbClr val="28685E"/>
                 </a:solidFill>
+                <a:latin typeface="Arial"/>
+                <a:ea typeface="Arial"/>
+                <a:cs typeface="Arial"/>
               </a:defRPr>
             </a:pPr>
             <a:r>
@@ -4688,6 +5227,9 @@
                 <a:solidFill>
                   <a:srgbClr val="28685E"/>
                 </a:solidFill>
+                <a:latin typeface="Arial"/>
+                <a:ea typeface="Arial"/>
+                <a:cs typeface="Arial"/>
               </a:rPr>
               <a:t>05</a:t>
             </a:r>
@@ -4710,8 +5252,8 @@
         </p:nvSpPr>
         <p:spPr>
           <a:xfrm xmlns:a="http://schemas.openxmlformats.org/drawingml/2006/main">
-            <a:off x="609600" y="2619375"/>
-            <a:ext cx="10972800" cy="781050"/>
+            <a:off x="609600" y="2305050"/>
+            <a:ext cx="7096125" cy="914400"/>
           </a:xfrm>
           <a:prstGeom xmlns:a="http://schemas.openxmlformats.org/drawingml/2006/main" prst="rect">
             <a:avLst/>
@@ -4723,14 +5265,20 @@
           </a:ln>
         </p:spPr>
         <p:txBody>
-          <a:bodyPr xmlns:a="http://schemas.openxmlformats.org/drawingml/2006/main" lIns="0" tIns="0" rIns="0" bIns="0" anchor="ctr"/>
+          <a:bodyPr xmlns:a="http://schemas.openxmlformats.org/drawingml/2006/main" wrap="square" lIns="0" tIns="0" rIns="0" bIns="0" anchor="ctr">
+            <a:noAutofit/>
+          </a:bodyPr>
           <a:lstStyle xmlns:a="http://schemas.openxmlformats.org/drawingml/2006/main"/>
           <a:p xmlns:a="http://schemas.openxmlformats.org/drawingml/2006/main">
             <a:pPr>
+              <a:buNone/>
               <a:defRPr sz="2550" b="0">
                 <a:solidFill>
                   <a:srgbClr val="152B3A"/>
                 </a:solidFill>
+                <a:latin typeface="Arial"/>
+                <a:ea typeface="Arial"/>
+                <a:cs typeface="Arial"/>
               </a:defRPr>
             </a:pPr>
             <a:r>
@@ -4738,6 +5286,9 @@
                 <a:solidFill>
                   <a:srgbClr val="152B3A"/>
                 </a:solidFill>
+                <a:latin typeface="Arial"/>
+                <a:ea typeface="Arial"/>
+                <a:cs typeface="Arial"/>
               </a:rPr>
               <a:t>Start model: meat, rice and vegetables.</a:t>
             </a:r>
@@ -4760,8 +5311,8 @@
         </p:nvSpPr>
         <p:spPr>
           <a:xfrm xmlns:a="http://schemas.openxmlformats.org/drawingml/2006/main">
-            <a:off x="609600" y="3476625"/>
-            <a:ext cx="10972800" cy="781050"/>
+            <a:off x="609600" y="3352800"/>
+            <a:ext cx="7096125" cy="914400"/>
           </a:xfrm>
           <a:prstGeom xmlns:a="http://schemas.openxmlformats.org/drawingml/2006/main" prst="rect">
             <a:avLst/>
@@ -4773,14 +5324,20 @@
           </a:ln>
         </p:spPr>
         <p:txBody>
-          <a:bodyPr xmlns:a="http://schemas.openxmlformats.org/drawingml/2006/main" lIns="0" tIns="0" rIns="0" bIns="0" anchor="ctr"/>
+          <a:bodyPr xmlns:a="http://schemas.openxmlformats.org/drawingml/2006/main" wrap="square" lIns="0" tIns="0" rIns="0" bIns="0" anchor="ctr">
+            <a:noAutofit/>
+          </a:bodyPr>
           <a:lstStyle xmlns:a="http://schemas.openxmlformats.org/drawingml/2006/main"/>
           <a:p xmlns:a="http://schemas.openxmlformats.org/drawingml/2006/main">
             <a:pPr>
+              <a:buNone/>
               <a:defRPr sz="2550" b="0">
                 <a:solidFill>
                   <a:srgbClr val="152B3A"/>
                 </a:solidFill>
+                <a:latin typeface="Arial"/>
+                <a:ea typeface="Arial"/>
+                <a:cs typeface="Arial"/>
               </a:defRPr>
             </a:pPr>
             <a:r>
@@ -4788,6 +5345,9 @@
                 <a:solidFill>
                   <a:srgbClr val="152B3A"/>
                 </a:solidFill>
+                <a:latin typeface="Arial"/>
+                <a:ea typeface="Arial"/>
+                <a:cs typeface="Arial"/>
               </a:rPr>
               <a:t>Now make the model meat-free.</a:t>
             </a:r>
@@ -4810,8 +5370,8 @@
         </p:nvSpPr>
         <p:spPr>
           <a:xfrm xmlns:a="http://schemas.openxmlformats.org/drawingml/2006/main">
-            <a:off x="609600" y="4333875"/>
-            <a:ext cx="10972800" cy="781050"/>
+            <a:off x="609600" y="4400550"/>
+            <a:ext cx="7096125" cy="914400"/>
           </a:xfrm>
           <a:prstGeom xmlns:a="http://schemas.openxmlformats.org/drawingml/2006/main" prst="rect">
             <a:avLst/>
@@ -4823,27 +5383,58 @@
           </a:ln>
         </p:spPr>
         <p:txBody>
-          <a:bodyPr xmlns:a="http://schemas.openxmlformats.org/drawingml/2006/main" lIns="0" tIns="0" rIns="0" bIns="0" anchor="ctr"/>
+          <a:bodyPr xmlns:a="http://schemas.openxmlformats.org/drawingml/2006/main" wrap="square" lIns="0" tIns="0" rIns="0" bIns="0" anchor="ctr">
+            <a:noAutofit/>
+          </a:bodyPr>
           <a:lstStyle xmlns:a="http://schemas.openxmlformats.org/drawingml/2006/main"/>
           <a:p xmlns:a="http://schemas.openxmlformats.org/drawingml/2006/main">
             <a:pPr>
-              <a:defRPr sz="2550" b="0">
-                <a:solidFill>
-                  <a:srgbClr val="152B3A"/>
-                </a:solidFill>
+              <a:buNone/>
+              <a:defRPr sz="2550" b="1">
+                <a:solidFill>
+                  <a:srgbClr val="28685E"/>
+                </a:solidFill>
+                <a:latin typeface="Arial"/>
+                <a:ea typeface="Arial"/>
+                <a:cs typeface="Arial"/>
               </a:defRPr>
             </a:pPr>
             <a:r>
-              <a:rPr sz="2550" b="0">
-                <a:solidFill>
-                  <a:srgbClr val="152B3A"/>
-                </a:solidFill>
+              <a:rPr sz="2550" b="1">
+                <a:solidFill>
+                  <a:srgbClr val="28685E"/>
+                </a:solidFill>
+                <a:latin typeface="Arial"/>
+                <a:ea typeface="Arial"/>
+                <a:cs typeface="Arial"/>
               </a:rPr>
               <a:t>Which card can replace meat’s protein role?</a:t>
             </a:r>
           </a:p>
         </p:txBody>
       </p:sp>
+      <p:pic>
+        <p:nvPicPr>
+          <p:cNvPr id="24" name=""/>
+          <p:cNvPicPr>
+            <a:picLocks xmlns:a="http://schemas.openxmlformats.org/drawingml/2006/main" noChangeAspect="1"/>
+          </p:cNvPicPr>
+          <p:nvPr/>
+        </p:nvPicPr>
+        <p:blipFill>
+          <a:blip xmlns:r="http://schemas.openxmlformats.org/officeDocument/2006/relationships" xmlns:a="http://schemas.openxmlformats.org/drawingml/2006/main" r:embed="R552bfcab29274bcb"/>
+          <a:stretch xmlns:a="http://schemas.openxmlformats.org/drawingml/2006/main"/>
+        </p:blipFill>
+        <p:spPr>
+          <a:xfrm xmlns:a="http://schemas.openxmlformats.org/drawingml/2006/main">
+            <a:off x="8614172" y="2686050"/>
+            <a:ext cx="2488406" cy="2714625"/>
+          </a:xfrm>
+          <a:prstGeom xmlns:a="http://schemas.openxmlformats.org/drawingml/2006/main" prst="rect">
+            <a:avLst/>
+          </a:prstGeom>
+        </p:spPr>
+      </p:pic>
     </p:spTree>
     <p:extLst>
       <p:ext uri="{BB962C8B-B14F-4D97-AF65-F5344CB8AC3E}">
@@ -4860,7 +5451,7 @@
     <p:bg>
       <p:bgPr>
         <a:solidFill xmlns:a="http://schemas.openxmlformats.org/drawingml/2006/main">
-          <a:srgbClr val="F5F1E8"/>
+          <a:srgbClr val="FBF9F3"/>
         </a:solidFill>
       </p:bgPr>
     </p:bg>
@@ -4889,8 +5480,8 @@
         </p:nvSpPr>
         <p:spPr>
           <a:xfrm xmlns:a="http://schemas.openxmlformats.org/drawingml/2006/main">
-            <a:off x="609600" y="552450"/>
-            <a:ext cx="781050" cy="57150"/>
+            <a:off x="609600" y="742950"/>
+            <a:ext cx="9906000" cy="38100"/>
           </a:xfrm>
           <a:prstGeom xmlns:a="http://schemas.openxmlformats.org/drawingml/2006/main" prst="rect">
             <a:avLst/>
@@ -4920,8 +5511,8 @@
         </p:nvSpPr>
         <p:spPr>
           <a:xfrm xmlns:a="http://schemas.openxmlformats.org/drawingml/2006/main">
-            <a:off x="609600" y="762000"/>
-            <a:ext cx="9334500" cy="285750"/>
+            <a:off x="609600" y="342900"/>
+            <a:ext cx="9334500" cy="266700"/>
           </a:xfrm>
           <a:prstGeom xmlns:a="http://schemas.openxmlformats.org/drawingml/2006/main" prst="rect">
             <a:avLst/>
@@ -4933,21 +5524,30 @@
           </a:ln>
         </p:spPr>
         <p:txBody>
-          <a:bodyPr xmlns:a="http://schemas.openxmlformats.org/drawingml/2006/main" lIns="0" tIns="0" rIns="0" bIns="0" anchor="ctr"/>
+          <a:bodyPr xmlns:a="http://schemas.openxmlformats.org/drawingml/2006/main" wrap="square" lIns="0" tIns="0" rIns="0" bIns="0" anchor="ctr">
+            <a:noAutofit/>
+          </a:bodyPr>
           <a:lstStyle xmlns:a="http://schemas.openxmlformats.org/drawingml/2006/main"/>
           <a:p xmlns:a="http://schemas.openxmlformats.org/drawingml/2006/main">
             <a:pPr>
-              <a:defRPr sz="1500" b="1">
+              <a:buNone/>
+              <a:defRPr sz="1425" b="1">
                 <a:solidFill>
                   <a:srgbClr val="28685E"/>
                 </a:solidFill>
+                <a:latin typeface="Arial"/>
+                <a:ea typeface="Arial"/>
+                <a:cs typeface="Arial"/>
               </a:defRPr>
             </a:pPr>
             <a:r>
-              <a:rPr sz="1500" b="1">
+              <a:rPr sz="1425" b="1">
                 <a:solidFill>
                   <a:srgbClr val="28685E"/>
                 </a:solidFill>
+                <a:latin typeface="Arial"/>
+                <a:ea typeface="Arial"/>
+                <a:cs typeface="Arial"/>
               </a:rPr>
               <a:t>MADE BY MATT  /  BUILD SCIENCE</a:t>
             </a:r>
@@ -4956,14 +5556,14 @@
       </p:sp>
       <p:pic>
         <p:nvPicPr>
-          <p:cNvPr id="13" name=""/>
+          <p:cNvPr id="15" name=""/>
           <p:cNvPicPr>
             <a:picLocks xmlns:a="http://schemas.openxmlformats.org/drawingml/2006/main" noChangeAspect="1"/>
           </p:cNvPicPr>
           <p:nvPr/>
         </p:nvPicPr>
         <p:blipFill>
-          <a:blip xmlns:r="http://schemas.openxmlformats.org/officeDocument/2006/relationships" xmlns:a="http://schemas.openxmlformats.org/drawingml/2006/main" r:embed="Recde10f9e0114d8a"/>
+          <a:blip xmlns:r="http://schemas.openxmlformats.org/officeDocument/2006/relationships" xmlns:a="http://schemas.openxmlformats.org/drawingml/2006/main" r:embed="R2e2ef30f66ec4d4a"/>
           <a:stretch xmlns:a="http://schemas.openxmlformats.org/drawingml/2006/main"/>
         </p:blipFill>
         <p:spPr>
@@ -4992,8 +5592,8 @@
         </p:nvSpPr>
         <p:spPr>
           <a:xfrm xmlns:a="http://schemas.openxmlformats.org/drawingml/2006/main">
-            <a:off x="609600" y="1352550"/>
-            <a:ext cx="10972800" cy="952500"/>
+            <a:off x="609600" y="1047750"/>
+            <a:ext cx="10972800" cy="895350"/>
           </a:xfrm>
           <a:prstGeom xmlns:a="http://schemas.openxmlformats.org/drawingml/2006/main" prst="rect">
             <a:avLst/>
@@ -5005,21 +5605,30 @@
           </a:ln>
         </p:spPr>
         <p:txBody>
-          <a:bodyPr xmlns:a="http://schemas.openxmlformats.org/drawingml/2006/main" lIns="0" tIns="0" rIns="0" bIns="0" anchor="ctr"/>
+          <a:bodyPr xmlns:a="http://schemas.openxmlformats.org/drawingml/2006/main" wrap="square" lIns="0" tIns="0" rIns="0" bIns="0" anchor="ctr">
+            <a:noAutofit/>
+          </a:bodyPr>
           <a:lstStyle xmlns:a="http://schemas.openxmlformats.org/drawingml/2006/main"/>
           <a:p xmlns:a="http://schemas.openxmlformats.org/drawingml/2006/main">
             <a:pPr>
-              <a:defRPr sz="3750" b="1">
+              <a:buNone/>
+              <a:defRPr sz="3600" b="1">
                 <a:solidFill>
                   <a:srgbClr val="152B3A"/>
                 </a:solidFill>
+                <a:latin typeface="Arial"/>
+                <a:ea typeface="Arial"/>
+                <a:cs typeface="Arial"/>
               </a:defRPr>
             </a:pPr>
             <a:r>
-              <a:rPr sz="3750" b="1">
+              <a:rPr sz="3600" b="1">
                 <a:solidFill>
                   <a:srgbClr val="152B3A"/>
                 </a:solidFill>
+                <a:latin typeface="Arial"/>
+                <a:ea typeface="Arial"/>
+                <a:cs typeface="Arial"/>
               </a:rPr>
               <a:t>Compare two workable choices</a:t>
             </a:r>
@@ -5086,21 +5695,30 @@
           </a:ln>
         </p:spPr>
         <p:txBody>
-          <a:bodyPr xmlns:a="http://schemas.openxmlformats.org/drawingml/2006/main" lIns="0" tIns="0" rIns="0" bIns="0" anchor="ctr"/>
+          <a:bodyPr xmlns:a="http://schemas.openxmlformats.org/drawingml/2006/main" wrap="square" lIns="0" tIns="0" rIns="0" bIns="0" anchor="ctr">
+            <a:noAutofit/>
+          </a:bodyPr>
           <a:lstStyle xmlns:a="http://schemas.openxmlformats.org/drawingml/2006/main"/>
           <a:p xmlns:a="http://schemas.openxmlformats.org/drawingml/2006/main">
             <a:pPr>
-              <a:defRPr sz="1275" b="0">
+              <a:buNone/>
+              <a:defRPr sz="1200" b="0">
                 <a:solidFill>
                   <a:srgbClr val="50616B"/>
                 </a:solidFill>
+                <a:latin typeface="Arial"/>
+                <a:ea typeface="Arial"/>
+                <a:cs typeface="Arial"/>
               </a:defRPr>
             </a:pPr>
             <a:r>
-              <a:rPr sz="1275" b="0">
+              <a:rPr sz="1200" b="0">
                 <a:solidFill>
                   <a:srgbClr val="50616B"/>
                 </a:solidFill>
+                <a:latin typeface="Arial"/>
+                <a:ea typeface="Arial"/>
+                <a:cs typeface="Arial"/>
               </a:rPr>
               <a:t>AUTUMN 1  ·  WEEK 5  ·  LESSON B</a:t>
             </a:r>
@@ -5136,14 +5754,20 @@
           </a:ln>
         </p:spPr>
         <p:txBody>
-          <a:bodyPr xmlns:a="http://schemas.openxmlformats.org/drawingml/2006/main" lIns="0" tIns="0" rIns="0" bIns="0" anchor="ctr"/>
+          <a:bodyPr xmlns:a="http://schemas.openxmlformats.org/drawingml/2006/main" wrap="square" lIns="0" tIns="0" rIns="0" bIns="0" anchor="ctr">
+            <a:noAutofit/>
+          </a:bodyPr>
           <a:lstStyle xmlns:a="http://schemas.openxmlformats.org/drawingml/2006/main"/>
           <a:p xmlns:a="http://schemas.openxmlformats.org/drawingml/2006/main">
             <a:pPr>
+              <a:buNone/>
               <a:defRPr sz="1350" b="1">
                 <a:solidFill>
                   <a:srgbClr val="28685E"/>
                 </a:solidFill>
+                <a:latin typeface="Arial"/>
+                <a:ea typeface="Arial"/>
+                <a:cs typeface="Arial"/>
               </a:defRPr>
             </a:pPr>
             <a:r>
@@ -5151,6 +5775,9 @@
                 <a:solidFill>
                   <a:srgbClr val="28685E"/>
                 </a:solidFill>
+                <a:latin typeface="Arial"/>
+                <a:ea typeface="Arial"/>
+                <a:cs typeface="Arial"/>
               </a:rPr>
               <a:t>06</a:t>
             </a:r>
@@ -5173,8 +5800,8 @@
         </p:nvSpPr>
         <p:spPr>
           <a:xfrm xmlns:a="http://schemas.openxmlformats.org/drawingml/2006/main">
-            <a:off x="609600" y="2619375"/>
-            <a:ext cx="10972800" cy="781050"/>
+            <a:off x="609600" y="2305050"/>
+            <a:ext cx="10972800" cy="914400"/>
           </a:xfrm>
           <a:prstGeom xmlns:a="http://schemas.openxmlformats.org/drawingml/2006/main" prst="rect">
             <a:avLst/>
@@ -5186,14 +5813,20 @@
           </a:ln>
         </p:spPr>
         <p:txBody>
-          <a:bodyPr xmlns:a="http://schemas.openxmlformats.org/drawingml/2006/main" lIns="0" tIns="0" rIns="0" bIns="0" anchor="ctr"/>
+          <a:bodyPr xmlns:a="http://schemas.openxmlformats.org/drawingml/2006/main" wrap="square" lIns="0" tIns="0" rIns="0" bIns="0" anchor="ctr">
+            <a:noAutofit/>
+          </a:bodyPr>
           <a:lstStyle xmlns:a="http://schemas.openxmlformats.org/drawingml/2006/main"/>
           <a:p xmlns:a="http://schemas.openxmlformats.org/drawingml/2006/main">
             <a:pPr>
+              <a:buNone/>
               <a:defRPr sz="2550" b="0">
                 <a:solidFill>
                   <a:srgbClr val="152B3A"/>
                 </a:solidFill>
+                <a:latin typeface="Arial"/>
+                <a:ea typeface="Arial"/>
+                <a:cs typeface="Arial"/>
               </a:defRPr>
             </a:pPr>
             <a:r>
@@ -5201,6 +5834,9 @@
                 <a:solidFill>
                   <a:srgbClr val="152B3A"/>
                 </a:solidFill>
+                <a:latin typeface="Arial"/>
+                <a:ea typeface="Arial"/>
+                <a:cs typeface="Arial"/>
               </a:rPr>
               <a:t>Try a beans version and a lentils version.</a:t>
             </a:r>
@@ -5223,8 +5859,8 @@
         </p:nvSpPr>
         <p:spPr>
           <a:xfrm xmlns:a="http://schemas.openxmlformats.org/drawingml/2006/main">
-            <a:off x="609600" y="3476625"/>
-            <a:ext cx="10972800" cy="781050"/>
+            <a:off x="609600" y="3352800"/>
+            <a:ext cx="10972800" cy="914400"/>
           </a:xfrm>
           <a:prstGeom xmlns:a="http://schemas.openxmlformats.org/drawingml/2006/main" prst="rect">
             <a:avLst/>
@@ -5236,14 +5872,20 @@
           </a:ln>
         </p:spPr>
         <p:txBody>
-          <a:bodyPr xmlns:a="http://schemas.openxmlformats.org/drawingml/2006/main" lIns="0" tIns="0" rIns="0" bIns="0" anchor="ctr"/>
+          <a:bodyPr xmlns:a="http://schemas.openxmlformats.org/drawingml/2006/main" wrap="square" lIns="0" tIns="0" rIns="0" bIns="0" anchor="ctr">
+            <a:noAutofit/>
+          </a:bodyPr>
           <a:lstStyle xmlns:a="http://schemas.openxmlformats.org/drawingml/2006/main"/>
           <a:p xmlns:a="http://schemas.openxmlformats.org/drawingml/2006/main">
             <a:pPr>
+              <a:buNone/>
               <a:defRPr sz="2550" b="0">
                 <a:solidFill>
                   <a:srgbClr val="152B3A"/>
                 </a:solidFill>
+                <a:latin typeface="Arial"/>
+                <a:ea typeface="Arial"/>
+                <a:cs typeface="Arial"/>
               </a:defRPr>
             </a:pPr>
             <a:r>
@@ -5251,6 +5893,9 @@
                 <a:solidFill>
                   <a:srgbClr val="152B3A"/>
                 </a:solidFill>
+                <a:latin typeface="Arial"/>
+                <a:ea typeface="Arial"/>
+                <a:cs typeface="Arial"/>
               </a:rPr>
               <a:t>Which body job does each help with?</a:t>
             </a:r>
@@ -5273,8 +5918,8 @@
         </p:nvSpPr>
         <p:spPr>
           <a:xfrm xmlns:a="http://schemas.openxmlformats.org/drawingml/2006/main">
-            <a:off x="609600" y="4333875"/>
-            <a:ext cx="10972800" cy="781050"/>
+            <a:off x="609600" y="4400550"/>
+            <a:ext cx="10972800" cy="914400"/>
           </a:xfrm>
           <a:prstGeom xmlns:a="http://schemas.openxmlformats.org/drawingml/2006/main" prst="rect">
             <a:avLst/>
@@ -5286,21 +5931,30 @@
           </a:ln>
         </p:spPr>
         <p:txBody>
-          <a:bodyPr xmlns:a="http://schemas.openxmlformats.org/drawingml/2006/main" lIns="0" tIns="0" rIns="0" bIns="0" anchor="ctr"/>
+          <a:bodyPr xmlns:a="http://schemas.openxmlformats.org/drawingml/2006/main" wrap="square" lIns="0" tIns="0" rIns="0" bIns="0" anchor="ctr">
+            <a:noAutofit/>
+          </a:bodyPr>
           <a:lstStyle xmlns:a="http://schemas.openxmlformats.org/drawingml/2006/main"/>
           <a:p xmlns:a="http://schemas.openxmlformats.org/drawingml/2006/main">
             <a:pPr>
-              <a:defRPr sz="2550" b="0">
-                <a:solidFill>
-                  <a:srgbClr val="152B3A"/>
-                </a:solidFill>
+              <a:buNone/>
+              <a:defRPr sz="2550" b="1">
+                <a:solidFill>
+                  <a:srgbClr val="28685E"/>
+                </a:solidFill>
+                <a:latin typeface="Arial"/>
+                <a:ea typeface="Arial"/>
+                <a:cs typeface="Arial"/>
               </a:defRPr>
             </a:pPr>
             <a:r>
-              <a:rPr sz="2550" b="0">
-                <a:solidFill>
-                  <a:srgbClr val="152B3A"/>
-                </a:solidFill>
+              <a:rPr sz="2550" b="1">
+                <a:solidFill>
+                  <a:srgbClr val="28685E"/>
+                </a:solidFill>
+                <a:latin typeface="Arial"/>
+                <a:ea typeface="Arial"/>
+                <a:cs typeface="Arial"/>
               </a:rPr>
               <a:t>How are the choices alike and different?</a:t>
             </a:r>
@@ -5323,7 +5977,7 @@
     <p:bg>
       <p:bgPr>
         <a:solidFill xmlns:a="http://schemas.openxmlformats.org/drawingml/2006/main">
-          <a:srgbClr val="F5F1E8"/>
+          <a:srgbClr val="FBF9F3"/>
         </a:solidFill>
       </p:bgPr>
     </p:bg>
@@ -5352,8 +6006,8 @@
         </p:nvSpPr>
         <p:spPr>
           <a:xfrm xmlns:a="http://schemas.openxmlformats.org/drawingml/2006/main">
-            <a:off x="609600" y="552450"/>
-            <a:ext cx="781050" cy="57150"/>
+            <a:off x="609600" y="742950"/>
+            <a:ext cx="9906000" cy="38100"/>
           </a:xfrm>
           <a:prstGeom xmlns:a="http://schemas.openxmlformats.org/drawingml/2006/main" prst="rect">
             <a:avLst/>
@@ -5383,8 +6037,8 @@
         </p:nvSpPr>
         <p:spPr>
           <a:xfrm xmlns:a="http://schemas.openxmlformats.org/drawingml/2006/main">
-            <a:off x="609600" y="762000"/>
-            <a:ext cx="9334500" cy="285750"/>
+            <a:off x="609600" y="342900"/>
+            <a:ext cx="9334500" cy="266700"/>
           </a:xfrm>
           <a:prstGeom xmlns:a="http://schemas.openxmlformats.org/drawingml/2006/main" prst="rect">
             <a:avLst/>
@@ -5396,21 +6050,30 @@
           </a:ln>
         </p:spPr>
         <p:txBody>
-          <a:bodyPr xmlns:a="http://schemas.openxmlformats.org/drawingml/2006/main" lIns="0" tIns="0" rIns="0" bIns="0" anchor="ctr"/>
+          <a:bodyPr xmlns:a="http://schemas.openxmlformats.org/drawingml/2006/main" wrap="square" lIns="0" tIns="0" rIns="0" bIns="0" anchor="ctr">
+            <a:noAutofit/>
+          </a:bodyPr>
           <a:lstStyle xmlns:a="http://schemas.openxmlformats.org/drawingml/2006/main"/>
           <a:p xmlns:a="http://schemas.openxmlformats.org/drawingml/2006/main">
             <a:pPr>
-              <a:defRPr sz="1500" b="1">
+              <a:buNone/>
+              <a:defRPr sz="1425" b="1">
                 <a:solidFill>
                   <a:srgbClr val="28685E"/>
                 </a:solidFill>
+                <a:latin typeface="Arial"/>
+                <a:ea typeface="Arial"/>
+                <a:cs typeface="Arial"/>
               </a:defRPr>
             </a:pPr>
             <a:r>
-              <a:rPr sz="1500" b="1">
+              <a:rPr sz="1425" b="1">
                 <a:solidFill>
                   <a:srgbClr val="28685E"/>
                 </a:solidFill>
+                <a:latin typeface="Arial"/>
+                <a:ea typeface="Arial"/>
+                <a:cs typeface="Arial"/>
               </a:rPr>
               <a:t>MADE BY MATT  /  BUILD SCIENCE</a:t>
             </a:r>
@@ -5419,14 +6082,14 @@
       </p:sp>
       <p:pic>
         <p:nvPicPr>
-          <p:cNvPr id="13" name=""/>
+          <p:cNvPr id="15" name=""/>
           <p:cNvPicPr>
             <a:picLocks xmlns:a="http://schemas.openxmlformats.org/drawingml/2006/main" noChangeAspect="1"/>
           </p:cNvPicPr>
           <p:nvPr/>
         </p:nvPicPr>
         <p:blipFill>
-          <a:blip xmlns:r="http://schemas.openxmlformats.org/officeDocument/2006/relationships" xmlns:a="http://schemas.openxmlformats.org/drawingml/2006/main" r:embed="Rd1dc4560e85f432a"/>
+          <a:blip xmlns:r="http://schemas.openxmlformats.org/officeDocument/2006/relationships" xmlns:a="http://schemas.openxmlformats.org/drawingml/2006/main" r:embed="R513d22519fb8467b"/>
           <a:stretch xmlns:a="http://schemas.openxmlformats.org/drawingml/2006/main"/>
         </p:blipFill>
         <p:spPr>
@@ -5455,8 +6118,8 @@
         </p:nvSpPr>
         <p:spPr>
           <a:xfrm xmlns:a="http://schemas.openxmlformats.org/drawingml/2006/main">
-            <a:off x="609600" y="1352550"/>
-            <a:ext cx="10972800" cy="952500"/>
+            <a:off x="609600" y="1047750"/>
+            <a:ext cx="10972800" cy="895350"/>
           </a:xfrm>
           <a:prstGeom xmlns:a="http://schemas.openxmlformats.org/drawingml/2006/main" prst="rect">
             <a:avLst/>
@@ -5468,21 +6131,30 @@
           </a:ln>
         </p:spPr>
         <p:txBody>
-          <a:bodyPr xmlns:a="http://schemas.openxmlformats.org/drawingml/2006/main" lIns="0" tIns="0" rIns="0" bIns="0" anchor="ctr"/>
+          <a:bodyPr xmlns:a="http://schemas.openxmlformats.org/drawingml/2006/main" wrap="square" lIns="0" tIns="0" rIns="0" bIns="0" anchor="ctr">
+            <a:noAutofit/>
+          </a:bodyPr>
           <a:lstStyle xmlns:a="http://schemas.openxmlformats.org/drawingml/2006/main"/>
           <a:p xmlns:a="http://schemas.openxmlformats.org/drawingml/2006/main">
             <a:pPr>
-              <a:defRPr sz="3750" b="1">
+              <a:buNone/>
+              <a:defRPr sz="3600" b="1">
                 <a:solidFill>
                   <a:srgbClr val="152B3A"/>
                 </a:solidFill>
+                <a:latin typeface="Arial"/>
+                <a:ea typeface="Arial"/>
+                <a:cs typeface="Arial"/>
               </a:defRPr>
             </a:pPr>
             <a:r>
-              <a:rPr sz="3750" b="1">
+              <a:rPr sz="3600" b="1">
                 <a:solidFill>
                   <a:srgbClr val="152B3A"/>
                 </a:solidFill>
+                <a:latin typeface="Arial"/>
+                <a:ea typeface="Arial"/>
+                <a:cs typeface="Arial"/>
               </a:rPr>
               <a:t>Pause: check the reason</a:t>
             </a:r>
@@ -5549,21 +6221,30 @@
           </a:ln>
         </p:spPr>
         <p:txBody>
-          <a:bodyPr xmlns:a="http://schemas.openxmlformats.org/drawingml/2006/main" lIns="0" tIns="0" rIns="0" bIns="0" anchor="ctr"/>
+          <a:bodyPr xmlns:a="http://schemas.openxmlformats.org/drawingml/2006/main" wrap="square" lIns="0" tIns="0" rIns="0" bIns="0" anchor="ctr">
+            <a:noAutofit/>
+          </a:bodyPr>
           <a:lstStyle xmlns:a="http://schemas.openxmlformats.org/drawingml/2006/main"/>
           <a:p xmlns:a="http://schemas.openxmlformats.org/drawingml/2006/main">
             <a:pPr>
-              <a:defRPr sz="1275" b="0">
+              <a:buNone/>
+              <a:defRPr sz="1200" b="0">
                 <a:solidFill>
                   <a:srgbClr val="50616B"/>
                 </a:solidFill>
+                <a:latin typeface="Arial"/>
+                <a:ea typeface="Arial"/>
+                <a:cs typeface="Arial"/>
               </a:defRPr>
             </a:pPr>
             <a:r>
-              <a:rPr sz="1275" b="0">
+              <a:rPr sz="1200" b="0">
                 <a:solidFill>
                   <a:srgbClr val="50616B"/>
                 </a:solidFill>
+                <a:latin typeface="Arial"/>
+                <a:ea typeface="Arial"/>
+                <a:cs typeface="Arial"/>
               </a:rPr>
               <a:t>AUTUMN 1  ·  WEEK 5  ·  LESSON B</a:t>
             </a:r>
@@ -5599,14 +6280,20 @@
           </a:ln>
         </p:spPr>
         <p:txBody>
-          <a:bodyPr xmlns:a="http://schemas.openxmlformats.org/drawingml/2006/main" lIns="0" tIns="0" rIns="0" bIns="0" anchor="ctr"/>
+          <a:bodyPr xmlns:a="http://schemas.openxmlformats.org/drawingml/2006/main" wrap="square" lIns="0" tIns="0" rIns="0" bIns="0" anchor="ctr">
+            <a:noAutofit/>
+          </a:bodyPr>
           <a:lstStyle xmlns:a="http://schemas.openxmlformats.org/drawingml/2006/main"/>
           <a:p xmlns:a="http://schemas.openxmlformats.org/drawingml/2006/main">
             <a:pPr>
+              <a:buNone/>
               <a:defRPr sz="1350" b="1">
                 <a:solidFill>
                   <a:srgbClr val="28685E"/>
                 </a:solidFill>
+                <a:latin typeface="Arial"/>
+                <a:ea typeface="Arial"/>
+                <a:cs typeface="Arial"/>
               </a:defRPr>
             </a:pPr>
             <a:r>
@@ -5614,6 +6301,9 @@
                 <a:solidFill>
                   <a:srgbClr val="28685E"/>
                 </a:solidFill>
+                <a:latin typeface="Arial"/>
+                <a:ea typeface="Arial"/>
+                <a:cs typeface="Arial"/>
               </a:rPr>
               <a:t>07</a:t>
             </a:r>
@@ -5636,8 +6326,8 @@
         </p:nvSpPr>
         <p:spPr>
           <a:xfrm xmlns:a="http://schemas.openxmlformats.org/drawingml/2006/main">
-            <a:off x="609600" y="2619375"/>
-            <a:ext cx="10972800" cy="781050"/>
+            <a:off x="609600" y="2305050"/>
+            <a:ext cx="10972800" cy="914400"/>
           </a:xfrm>
           <a:prstGeom xmlns:a="http://schemas.openxmlformats.org/drawingml/2006/main" prst="rect">
             <a:avLst/>
@@ -5649,14 +6339,20 @@
           </a:ln>
         </p:spPr>
         <p:txBody>
-          <a:bodyPr xmlns:a="http://schemas.openxmlformats.org/drawingml/2006/main" lIns="0" tIns="0" rIns="0" bIns="0" anchor="ctr"/>
+          <a:bodyPr xmlns:a="http://schemas.openxmlformats.org/drawingml/2006/main" wrap="square" lIns="0" tIns="0" rIns="0" bIns="0" anchor="ctr">
+            <a:noAutofit/>
+          </a:bodyPr>
           <a:lstStyle xmlns:a="http://schemas.openxmlformats.org/drawingml/2006/main"/>
           <a:p xmlns:a="http://schemas.openxmlformats.org/drawingml/2006/main">
             <a:pPr>
+              <a:buNone/>
               <a:defRPr sz="2550" b="0">
                 <a:solidFill>
                   <a:srgbClr val="152B3A"/>
                 </a:solidFill>
+                <a:latin typeface="Arial"/>
+                <a:ea typeface="Arial"/>
+                <a:cs typeface="Arial"/>
               </a:defRPr>
             </a:pPr>
             <a:r>
@@ -5664,6 +6360,9 @@
                 <a:solidFill>
                   <a:srgbClr val="152B3A"/>
                 </a:solidFill>
+                <a:latin typeface="Arial"/>
+                <a:ea typeface="Arial"/>
+                <a:cs typeface="Arial"/>
               </a:rPr>
               <a:t>Does the reason name a body job?</a:t>
             </a:r>
@@ -5686,8 +6385,8 @@
         </p:nvSpPr>
         <p:spPr>
           <a:xfrm xmlns:a="http://schemas.openxmlformats.org/drawingml/2006/main">
-            <a:off x="609600" y="3476625"/>
-            <a:ext cx="10972800" cy="781050"/>
+            <a:off x="609600" y="3352800"/>
+            <a:ext cx="10972800" cy="914400"/>
           </a:xfrm>
           <a:prstGeom xmlns:a="http://schemas.openxmlformats.org/drawingml/2006/main" prst="rect">
             <a:avLst/>
@@ -5699,14 +6398,20 @@
           </a:ln>
         </p:spPr>
         <p:txBody>
-          <a:bodyPr xmlns:a="http://schemas.openxmlformats.org/drawingml/2006/main" lIns="0" tIns="0" rIns="0" bIns="0" anchor="ctr"/>
+          <a:bodyPr xmlns:a="http://schemas.openxmlformats.org/drawingml/2006/main" wrap="square" lIns="0" tIns="0" rIns="0" bIns="0" anchor="ctr">
+            <a:noAutofit/>
+          </a:bodyPr>
           <a:lstStyle xmlns:a="http://schemas.openxmlformats.org/drawingml/2006/main"/>
           <a:p xmlns:a="http://schemas.openxmlformats.org/drawingml/2006/main">
             <a:pPr>
+              <a:buNone/>
               <a:defRPr sz="2550" b="0">
                 <a:solidFill>
                   <a:srgbClr val="152B3A"/>
                 </a:solidFill>
+                <a:latin typeface="Arial"/>
+                <a:ea typeface="Arial"/>
+                <a:cs typeface="Arial"/>
               </a:defRPr>
             </a:pPr>
             <a:r>
@@ -5714,6 +6419,9 @@
                 <a:solidFill>
                   <a:srgbClr val="152B3A"/>
                 </a:solidFill>
+                <a:latin typeface="Arial"/>
+                <a:ea typeface="Arial"/>
+                <a:cs typeface="Arial"/>
               </a:rPr>
               <a:t>Check it against the food information.</a:t>
             </a:r>
@@ -5736,8 +6444,8 @@
         </p:nvSpPr>
         <p:spPr>
           <a:xfrm xmlns:a="http://schemas.openxmlformats.org/drawingml/2006/main">
-            <a:off x="609600" y="4333875"/>
-            <a:ext cx="10972800" cy="781050"/>
+            <a:off x="609600" y="4400550"/>
+            <a:ext cx="10972800" cy="914400"/>
           </a:xfrm>
           <a:prstGeom xmlns:a="http://schemas.openxmlformats.org/drawingml/2006/main" prst="rect">
             <a:avLst/>
@@ -5749,21 +6457,30 @@
           </a:ln>
         </p:spPr>
         <p:txBody>
-          <a:bodyPr xmlns:a="http://schemas.openxmlformats.org/drawingml/2006/main" lIns="0" tIns="0" rIns="0" bIns="0" anchor="ctr"/>
+          <a:bodyPr xmlns:a="http://schemas.openxmlformats.org/drawingml/2006/main" wrap="square" lIns="0" tIns="0" rIns="0" bIns="0" anchor="ctr">
+            <a:noAutofit/>
+          </a:bodyPr>
           <a:lstStyle xmlns:a="http://schemas.openxmlformats.org/drawingml/2006/main"/>
           <a:p xmlns:a="http://schemas.openxmlformats.org/drawingml/2006/main">
             <a:pPr>
-              <a:defRPr sz="2550" b="0">
-                <a:solidFill>
-                  <a:srgbClr val="152B3A"/>
-                </a:solidFill>
+              <a:buNone/>
+              <a:defRPr sz="2550" b="1">
+                <a:solidFill>
+                  <a:srgbClr val="28685E"/>
+                </a:solidFill>
+                <a:latin typeface="Arial"/>
+                <a:ea typeface="Arial"/>
+                <a:cs typeface="Arial"/>
               </a:defRPr>
             </a:pPr>
             <a:r>
-              <a:rPr sz="2550" b="0">
-                <a:solidFill>
-                  <a:srgbClr val="152B3A"/>
-                </a:solidFill>
+              <a:rPr sz="2550" b="1">
+                <a:solidFill>
+                  <a:srgbClr val="28685E"/>
+                </a:solidFill>
+                <a:latin typeface="Arial"/>
+                <a:ea typeface="Arial"/>
+                <a:cs typeface="Arial"/>
               </a:rPr>
               <a:t>“I like it” does not show its nutrient job.</a:t>
             </a:r>
@@ -5786,7 +6503,7 @@
     <p:bg>
       <p:bgPr>
         <a:solidFill xmlns:a="http://schemas.openxmlformats.org/drawingml/2006/main">
-          <a:srgbClr val="F5F1E8"/>
+          <a:srgbClr val="FBF9F3"/>
         </a:solidFill>
       </p:bgPr>
     </p:bg>
@@ -5815,8 +6532,8 @@
         </p:nvSpPr>
         <p:spPr>
           <a:xfrm xmlns:a="http://schemas.openxmlformats.org/drawingml/2006/main">
-            <a:off x="609600" y="552450"/>
-            <a:ext cx="781050" cy="57150"/>
+            <a:off x="609600" y="742950"/>
+            <a:ext cx="9906000" cy="38100"/>
           </a:xfrm>
           <a:prstGeom xmlns:a="http://schemas.openxmlformats.org/drawingml/2006/main" prst="rect">
             <a:avLst/>
@@ -5846,8 +6563,8 @@
         </p:nvSpPr>
         <p:spPr>
           <a:xfrm xmlns:a="http://schemas.openxmlformats.org/drawingml/2006/main">
-            <a:off x="609600" y="762000"/>
-            <a:ext cx="9334500" cy="285750"/>
+            <a:off x="609600" y="342900"/>
+            <a:ext cx="9334500" cy="266700"/>
           </a:xfrm>
           <a:prstGeom xmlns:a="http://schemas.openxmlformats.org/drawingml/2006/main" prst="rect">
             <a:avLst/>
@@ -5859,21 +6576,30 @@
           </a:ln>
         </p:spPr>
         <p:txBody>
-          <a:bodyPr xmlns:a="http://schemas.openxmlformats.org/drawingml/2006/main" lIns="0" tIns="0" rIns="0" bIns="0" anchor="ctr"/>
+          <a:bodyPr xmlns:a="http://schemas.openxmlformats.org/drawingml/2006/main" wrap="square" lIns="0" tIns="0" rIns="0" bIns="0" anchor="ctr">
+            <a:noAutofit/>
+          </a:bodyPr>
           <a:lstStyle xmlns:a="http://schemas.openxmlformats.org/drawingml/2006/main"/>
           <a:p xmlns:a="http://schemas.openxmlformats.org/drawingml/2006/main">
             <a:pPr>
-              <a:defRPr sz="1500" b="1">
+              <a:buNone/>
+              <a:defRPr sz="1425" b="1">
                 <a:solidFill>
                   <a:srgbClr val="28685E"/>
                 </a:solidFill>
+                <a:latin typeface="Arial"/>
+                <a:ea typeface="Arial"/>
+                <a:cs typeface="Arial"/>
               </a:defRPr>
             </a:pPr>
             <a:r>
-              <a:rPr sz="1500" b="1">
+              <a:rPr sz="1425" b="1">
                 <a:solidFill>
                   <a:srgbClr val="28685E"/>
                 </a:solidFill>
+                <a:latin typeface="Arial"/>
+                <a:ea typeface="Arial"/>
+                <a:cs typeface="Arial"/>
               </a:rPr>
               <a:t>MADE BY MATT  /  BUILD SCIENCE</a:t>
             </a:r>
@@ -5882,14 +6608,14 @@
       </p:sp>
       <p:pic>
         <p:nvPicPr>
-          <p:cNvPr id="14" name=""/>
+          <p:cNvPr id="16" name=""/>
           <p:cNvPicPr>
             <a:picLocks xmlns:a="http://schemas.openxmlformats.org/drawingml/2006/main" noChangeAspect="1"/>
           </p:cNvPicPr>
           <p:nvPr/>
         </p:nvPicPr>
         <p:blipFill>
-          <a:blip xmlns:r="http://schemas.openxmlformats.org/officeDocument/2006/relationships" xmlns:a="http://schemas.openxmlformats.org/drawingml/2006/main" r:embed="R505329778b4a4793"/>
+          <a:blip xmlns:r="http://schemas.openxmlformats.org/officeDocument/2006/relationships" xmlns:a="http://schemas.openxmlformats.org/drawingml/2006/main" r:embed="R75144c9aac7a4339"/>
           <a:stretch xmlns:a="http://schemas.openxmlformats.org/drawingml/2006/main"/>
         </p:blipFill>
         <p:spPr>
@@ -5918,8 +6644,8 @@
         </p:nvSpPr>
         <p:spPr>
           <a:xfrm xmlns:a="http://schemas.openxmlformats.org/drawingml/2006/main">
-            <a:off x="609600" y="1352550"/>
-            <a:ext cx="10972800" cy="952500"/>
+            <a:off x="609600" y="1047750"/>
+            <a:ext cx="10972800" cy="895350"/>
           </a:xfrm>
           <a:prstGeom xmlns:a="http://schemas.openxmlformats.org/drawingml/2006/main" prst="rect">
             <a:avLst/>
@@ -5931,21 +6657,30 @@
           </a:ln>
         </p:spPr>
         <p:txBody>
-          <a:bodyPr xmlns:a="http://schemas.openxmlformats.org/drawingml/2006/main" lIns="0" tIns="0" rIns="0" bIns="0" anchor="ctr"/>
+          <a:bodyPr xmlns:a="http://schemas.openxmlformats.org/drawingml/2006/main" wrap="square" lIns="0" tIns="0" rIns="0" bIns="0" anchor="ctr">
+            <a:noAutofit/>
+          </a:bodyPr>
           <a:lstStyle xmlns:a="http://schemas.openxmlformats.org/drawingml/2006/main"/>
           <a:p xmlns:a="http://schemas.openxmlformats.org/drawingml/2006/main">
             <a:pPr>
-              <a:defRPr sz="3750" b="1">
+              <a:buNone/>
+              <a:defRPr sz="3600" b="1">
                 <a:solidFill>
                   <a:srgbClr val="152B3A"/>
                 </a:solidFill>
+                <a:latin typeface="Arial"/>
+                <a:ea typeface="Arial"/>
+                <a:cs typeface="Arial"/>
               </a:defRPr>
             </a:pPr>
             <a:r>
-              <a:rPr sz="3750" b="1">
+              <a:rPr sz="3600" b="1">
                 <a:solidFill>
                   <a:srgbClr val="152B3A"/>
                 </a:solidFill>
+                <a:latin typeface="Arial"/>
+                <a:ea typeface="Arial"/>
+                <a:cs typeface="Arial"/>
               </a:rPr>
               <a:t>Improve one choice or explanation</a:t>
             </a:r>
@@ -6012,21 +6747,30 @@
           </a:ln>
         </p:spPr>
         <p:txBody>
-          <a:bodyPr xmlns:a="http://schemas.openxmlformats.org/drawingml/2006/main" lIns="0" tIns="0" rIns="0" bIns="0" anchor="ctr"/>
+          <a:bodyPr xmlns:a="http://schemas.openxmlformats.org/drawingml/2006/main" wrap="square" lIns="0" tIns="0" rIns="0" bIns="0" anchor="ctr">
+            <a:noAutofit/>
+          </a:bodyPr>
           <a:lstStyle xmlns:a="http://schemas.openxmlformats.org/drawingml/2006/main"/>
           <a:p xmlns:a="http://schemas.openxmlformats.org/drawingml/2006/main">
             <a:pPr>
-              <a:defRPr sz="1275" b="0">
+              <a:buNone/>
+              <a:defRPr sz="1200" b="0">
                 <a:solidFill>
                   <a:srgbClr val="50616B"/>
                 </a:solidFill>
+                <a:latin typeface="Arial"/>
+                <a:ea typeface="Arial"/>
+                <a:cs typeface="Arial"/>
               </a:defRPr>
             </a:pPr>
             <a:r>
-              <a:rPr sz="1275" b="0">
+              <a:rPr sz="1200" b="0">
                 <a:solidFill>
                   <a:srgbClr val="50616B"/>
                 </a:solidFill>
+                <a:latin typeface="Arial"/>
+                <a:ea typeface="Arial"/>
+                <a:cs typeface="Arial"/>
               </a:rPr>
               <a:t>AUTUMN 1  ·  WEEK 5  ·  LESSON B</a:t>
             </a:r>
@@ -6062,14 +6806,20 @@
           </a:ln>
         </p:spPr>
         <p:txBody>
-          <a:bodyPr xmlns:a="http://schemas.openxmlformats.org/drawingml/2006/main" lIns="0" tIns="0" rIns="0" bIns="0" anchor="ctr"/>
+          <a:bodyPr xmlns:a="http://schemas.openxmlformats.org/drawingml/2006/main" wrap="square" lIns="0" tIns="0" rIns="0" bIns="0" anchor="ctr">
+            <a:noAutofit/>
+          </a:bodyPr>
           <a:lstStyle xmlns:a="http://schemas.openxmlformats.org/drawingml/2006/main"/>
           <a:p xmlns:a="http://schemas.openxmlformats.org/drawingml/2006/main">
             <a:pPr>
+              <a:buNone/>
               <a:defRPr sz="1350" b="1">
                 <a:solidFill>
                   <a:srgbClr val="28685E"/>
                 </a:solidFill>
+                <a:latin typeface="Arial"/>
+                <a:ea typeface="Arial"/>
+                <a:cs typeface="Arial"/>
               </a:defRPr>
             </a:pPr>
             <a:r>
@@ -6077,6 +6827,9 @@
                 <a:solidFill>
                   <a:srgbClr val="28685E"/>
                 </a:solidFill>
+                <a:latin typeface="Arial"/>
+                <a:ea typeface="Arial"/>
+                <a:cs typeface="Arial"/>
               </a:rPr>
               <a:t>08</a:t>
             </a:r>
@@ -6099,8 +6852,8 @@
         </p:nvSpPr>
         <p:spPr>
           <a:xfrm xmlns:a="http://schemas.openxmlformats.org/drawingml/2006/main">
-            <a:off x="609600" y="2619375"/>
-            <a:ext cx="10972800" cy="714375"/>
+            <a:off x="609600" y="2305050"/>
+            <a:ext cx="10972800" cy="704850"/>
           </a:xfrm>
           <a:prstGeom xmlns:a="http://schemas.openxmlformats.org/drawingml/2006/main" prst="rect">
             <a:avLst/>
@@ -6112,14 +6865,20 @@
           </a:ln>
         </p:spPr>
         <p:txBody>
-          <a:bodyPr xmlns:a="http://schemas.openxmlformats.org/drawingml/2006/main" lIns="0" tIns="0" rIns="0" bIns="0" anchor="ctr"/>
+          <a:bodyPr xmlns:a="http://schemas.openxmlformats.org/drawingml/2006/main" wrap="square" lIns="0" tIns="0" rIns="0" bIns="0" anchor="ctr">
+            <a:noAutofit/>
+          </a:bodyPr>
           <a:lstStyle xmlns:a="http://schemas.openxmlformats.org/drawingml/2006/main"/>
           <a:p xmlns:a="http://schemas.openxmlformats.org/drawingml/2006/main">
             <a:pPr>
+              <a:buNone/>
               <a:defRPr sz="2550" b="0">
                 <a:solidFill>
                   <a:srgbClr val="152B3A"/>
                 </a:solidFill>
+                <a:latin typeface="Arial"/>
+                <a:ea typeface="Arial"/>
+                <a:cs typeface="Arial"/>
               </a:defRPr>
             </a:pPr>
             <a:r>
@@ -6127,6 +6886,9 @@
                 <a:solidFill>
                   <a:srgbClr val="152B3A"/>
                 </a:solidFill>
+                <a:latin typeface="Arial"/>
+                <a:ea typeface="Arial"/>
+                <a:cs typeface="Arial"/>
               </a:rPr>
               <a:t>Keep the first version of a case.</a:t>
             </a:r>
@@ -6149,8 +6911,8 @@
         </p:nvSpPr>
         <p:spPr>
           <a:xfrm xmlns:a="http://schemas.openxmlformats.org/drawingml/2006/main">
-            <a:off x="609600" y="3409950"/>
-            <a:ext cx="10972800" cy="714375"/>
+            <a:off x="609600" y="3143250"/>
+            <a:ext cx="10972800" cy="704850"/>
           </a:xfrm>
           <a:prstGeom xmlns:a="http://schemas.openxmlformats.org/drawingml/2006/main" prst="rect">
             <a:avLst/>
@@ -6162,14 +6924,20 @@
           </a:ln>
         </p:spPr>
         <p:txBody>
-          <a:bodyPr xmlns:a="http://schemas.openxmlformats.org/drawingml/2006/main" lIns="0" tIns="0" rIns="0" bIns="0" anchor="ctr"/>
+          <a:bodyPr xmlns:a="http://schemas.openxmlformats.org/drawingml/2006/main" wrap="square" lIns="0" tIns="0" rIns="0" bIns="0" anchor="ctr">
+            <a:noAutofit/>
+          </a:bodyPr>
           <a:lstStyle xmlns:a="http://schemas.openxmlformats.org/drawingml/2006/main"/>
           <a:p xmlns:a="http://schemas.openxmlformats.org/drawingml/2006/main">
             <a:pPr>
+              <a:buNone/>
               <a:defRPr sz="2550" b="0">
                 <a:solidFill>
                   <a:srgbClr val="152B3A"/>
                 </a:solidFill>
+                <a:latin typeface="Arial"/>
+                <a:ea typeface="Arial"/>
+                <a:cs typeface="Arial"/>
               </a:defRPr>
             </a:pPr>
             <a:r>
@@ -6177,6 +6945,9 @@
                 <a:solidFill>
                   <a:srgbClr val="152B3A"/>
                 </a:solidFill>
+                <a:latin typeface="Arial"/>
+                <a:ea typeface="Arial"/>
+                <a:cs typeface="Arial"/>
               </a:rPr>
               <a:t>Change one choice or make the reason clearer.</a:t>
             </a:r>
@@ -6199,8 +6970,8 @@
         </p:nvSpPr>
         <p:spPr>
           <a:xfrm xmlns:a="http://schemas.openxmlformats.org/drawingml/2006/main">
-            <a:off x="609600" y="4200525"/>
-            <a:ext cx="10972800" cy="714375"/>
+            <a:off x="609600" y="3981450"/>
+            <a:ext cx="10972800" cy="704850"/>
           </a:xfrm>
           <a:prstGeom xmlns:a="http://schemas.openxmlformats.org/drawingml/2006/main" prst="rect">
             <a:avLst/>
@@ -6212,14 +6983,20 @@
           </a:ln>
         </p:spPr>
         <p:txBody>
-          <a:bodyPr xmlns:a="http://schemas.openxmlformats.org/drawingml/2006/main" lIns="0" tIns="0" rIns="0" bIns="0" anchor="ctr"/>
+          <a:bodyPr xmlns:a="http://schemas.openxmlformats.org/drawingml/2006/main" wrap="square" lIns="0" tIns="0" rIns="0" bIns="0" anchor="ctr">
+            <a:noAutofit/>
+          </a:bodyPr>
           <a:lstStyle xmlns:a="http://schemas.openxmlformats.org/drawingml/2006/main"/>
           <a:p xmlns:a="http://schemas.openxmlformats.org/drawingml/2006/main">
             <a:pPr>
+              <a:buNone/>
               <a:defRPr sz="2550" b="0">
                 <a:solidFill>
                   <a:srgbClr val="152B3A"/>
                 </a:solidFill>
+                <a:latin typeface="Arial"/>
+                <a:ea typeface="Arial"/>
+                <a:cs typeface="Arial"/>
               </a:defRPr>
             </a:pPr>
             <a:r>
@@ -6227,6 +7004,9 @@
                 <a:solidFill>
                   <a:srgbClr val="152B3A"/>
                 </a:solidFill>
+                <a:latin typeface="Arial"/>
+                <a:ea typeface="Arial"/>
+                <a:cs typeface="Arial"/>
               </a:rPr>
               <a:t>Show what the food provides.</a:t>
             </a:r>
@@ -6249,8 +7029,8 @@
         </p:nvSpPr>
         <p:spPr>
           <a:xfrm xmlns:a="http://schemas.openxmlformats.org/drawingml/2006/main">
-            <a:off x="609600" y="4991100"/>
-            <a:ext cx="10972800" cy="714375"/>
+            <a:off x="609600" y="4819650"/>
+            <a:ext cx="10972800" cy="704850"/>
           </a:xfrm>
           <a:prstGeom xmlns:a="http://schemas.openxmlformats.org/drawingml/2006/main" prst="rect">
             <a:avLst/>
@@ -6262,21 +7042,30 @@
           </a:ln>
         </p:spPr>
         <p:txBody>
-          <a:bodyPr xmlns:a="http://schemas.openxmlformats.org/drawingml/2006/main" lIns="0" tIns="0" rIns="0" bIns="0" anchor="ctr"/>
+          <a:bodyPr xmlns:a="http://schemas.openxmlformats.org/drawingml/2006/main" wrap="square" lIns="0" tIns="0" rIns="0" bIns="0" anchor="ctr">
+            <a:noAutofit/>
+          </a:bodyPr>
           <a:lstStyle xmlns:a="http://schemas.openxmlformats.org/drawingml/2006/main"/>
           <a:p xmlns:a="http://schemas.openxmlformats.org/drawingml/2006/main">
             <a:pPr>
-              <a:defRPr sz="2550" b="0">
-                <a:solidFill>
-                  <a:srgbClr val="152B3A"/>
-                </a:solidFill>
+              <a:buNone/>
+              <a:defRPr sz="2550" b="1">
+                <a:solidFill>
+                  <a:srgbClr val="28685E"/>
+                </a:solidFill>
+                <a:latin typeface="Arial"/>
+                <a:ea typeface="Arial"/>
+                <a:cs typeface="Arial"/>
               </a:defRPr>
             </a:pPr>
             <a:r>
-              <a:rPr sz="2550" b="0">
-                <a:solidFill>
-                  <a:srgbClr val="152B3A"/>
-                </a:solidFill>
+              <a:rPr sz="2550" b="1">
+                <a:solidFill>
+                  <a:srgbClr val="28685E"/>
+                </a:solidFill>
+                <a:latin typeface="Arial"/>
+                <a:ea typeface="Arial"/>
+                <a:cs typeface="Arial"/>
               </a:rPr>
               <a:t>Save both versions and tidy the cards.</a:t>
             </a:r>
@@ -6299,7 +7088,7 @@
     <p:bg>
       <p:bgPr>
         <a:solidFill xmlns:a="http://schemas.openxmlformats.org/drawingml/2006/main">
-          <a:srgbClr val="F5F1E8"/>
+          <a:srgbClr val="FBF9F3"/>
         </a:solidFill>
       </p:bgPr>
     </p:bg>
@@ -6328,8 +7117,8 @@
         </p:nvSpPr>
         <p:spPr>
           <a:xfrm xmlns:a="http://schemas.openxmlformats.org/drawingml/2006/main">
-            <a:off x="609600" y="552450"/>
-            <a:ext cx="781050" cy="57150"/>
+            <a:off x="609600" y="742950"/>
+            <a:ext cx="9906000" cy="38100"/>
           </a:xfrm>
           <a:prstGeom xmlns:a="http://schemas.openxmlformats.org/drawingml/2006/main" prst="rect">
             <a:avLst/>
@@ -6359,8 +7148,8 @@
         </p:nvSpPr>
         <p:spPr>
           <a:xfrm xmlns:a="http://schemas.openxmlformats.org/drawingml/2006/main">
-            <a:off x="609600" y="762000"/>
-            <a:ext cx="9334500" cy="285750"/>
+            <a:off x="609600" y="342900"/>
+            <a:ext cx="9334500" cy="266700"/>
           </a:xfrm>
           <a:prstGeom xmlns:a="http://schemas.openxmlformats.org/drawingml/2006/main" prst="rect">
             <a:avLst/>
@@ -6372,21 +7161,30 @@
           </a:ln>
         </p:spPr>
         <p:txBody>
-          <a:bodyPr xmlns:a="http://schemas.openxmlformats.org/drawingml/2006/main" lIns="0" tIns="0" rIns="0" bIns="0" anchor="ctr"/>
+          <a:bodyPr xmlns:a="http://schemas.openxmlformats.org/drawingml/2006/main" wrap="square" lIns="0" tIns="0" rIns="0" bIns="0" anchor="ctr">
+            <a:noAutofit/>
+          </a:bodyPr>
           <a:lstStyle xmlns:a="http://schemas.openxmlformats.org/drawingml/2006/main"/>
           <a:p xmlns:a="http://schemas.openxmlformats.org/drawingml/2006/main">
             <a:pPr>
-              <a:defRPr sz="1500" b="1">
+              <a:buNone/>
+              <a:defRPr sz="1425" b="1">
                 <a:solidFill>
                   <a:srgbClr val="28685E"/>
                 </a:solidFill>
+                <a:latin typeface="Arial"/>
+                <a:ea typeface="Arial"/>
+                <a:cs typeface="Arial"/>
               </a:defRPr>
             </a:pPr>
             <a:r>
-              <a:rPr sz="1500" b="1">
+              <a:rPr sz="1425" b="1">
                 <a:solidFill>
                   <a:srgbClr val="28685E"/>
                 </a:solidFill>
+                <a:latin typeface="Arial"/>
+                <a:ea typeface="Arial"/>
+                <a:cs typeface="Arial"/>
               </a:rPr>
               <a:t>MADE BY MATT  /  BUILD SCIENCE</a:t>
             </a:r>
@@ -6395,14 +7193,14 @@
       </p:sp>
       <p:pic>
         <p:nvPicPr>
-          <p:cNvPr id="14" name=""/>
+          <p:cNvPr id="16" name=""/>
           <p:cNvPicPr>
             <a:picLocks xmlns:a="http://schemas.openxmlformats.org/drawingml/2006/main" noChangeAspect="1"/>
           </p:cNvPicPr>
           <p:nvPr/>
         </p:nvPicPr>
         <p:blipFill>
-          <a:blip xmlns:r="http://schemas.openxmlformats.org/officeDocument/2006/relationships" xmlns:a="http://schemas.openxmlformats.org/drawingml/2006/main" r:embed="R30a3263163304f01"/>
+          <a:blip xmlns:r="http://schemas.openxmlformats.org/officeDocument/2006/relationships" xmlns:a="http://schemas.openxmlformats.org/drawingml/2006/main" r:embed="R2cae981c111441b4"/>
           <a:stretch xmlns:a="http://schemas.openxmlformats.org/drawingml/2006/main"/>
         </p:blipFill>
         <p:spPr>
@@ -6431,8 +7229,8 @@
         </p:nvSpPr>
         <p:spPr>
           <a:xfrm xmlns:a="http://schemas.openxmlformats.org/drawingml/2006/main">
-            <a:off x="609600" y="1352550"/>
-            <a:ext cx="10972800" cy="952500"/>
+            <a:off x="609600" y="1047750"/>
+            <a:ext cx="10972800" cy="895350"/>
           </a:xfrm>
           <a:prstGeom xmlns:a="http://schemas.openxmlformats.org/drawingml/2006/main" prst="rect">
             <a:avLst/>
@@ -6444,21 +7242,30 @@
           </a:ln>
         </p:spPr>
         <p:txBody>
-          <a:bodyPr xmlns:a="http://schemas.openxmlformats.org/drawingml/2006/main" lIns="0" tIns="0" rIns="0" bIns="0" anchor="ctr"/>
+          <a:bodyPr xmlns:a="http://schemas.openxmlformats.org/drawingml/2006/main" wrap="square" lIns="0" tIns="0" rIns="0" bIns="0" anchor="ctr">
+            <a:noAutofit/>
+          </a:bodyPr>
           <a:lstStyle xmlns:a="http://schemas.openxmlformats.org/drawingml/2006/main"/>
           <a:p xmlns:a="http://schemas.openxmlformats.org/drawingml/2006/main">
             <a:pPr>
-              <a:defRPr sz="3750" b="1">
+              <a:buNone/>
+              <a:defRPr sz="3600" b="1">
                 <a:solidFill>
                   <a:srgbClr val="152B3A"/>
                 </a:solidFill>
+                <a:latin typeface="Arial"/>
+                <a:ea typeface="Arial"/>
+                <a:cs typeface="Arial"/>
               </a:defRPr>
             </a:pPr>
             <a:r>
-              <a:rPr sz="3750" b="1">
+              <a:rPr sz="3600" b="1">
                 <a:solidFill>
                   <a:srgbClr val="152B3A"/>
                 </a:solidFill>
+                <a:latin typeface="Arial"/>
+                <a:ea typeface="Arial"/>
+                <a:cs typeface="Arial"/>
               </a:rPr>
               <a:t>Your voice can change the lesson</a:t>
             </a:r>
@@ -6525,21 +7332,30 @@
           </a:ln>
         </p:spPr>
         <p:txBody>
-          <a:bodyPr xmlns:a="http://schemas.openxmlformats.org/drawingml/2006/main" lIns="0" tIns="0" rIns="0" bIns="0" anchor="ctr"/>
+          <a:bodyPr xmlns:a="http://schemas.openxmlformats.org/drawingml/2006/main" wrap="square" lIns="0" tIns="0" rIns="0" bIns="0" anchor="ctr">
+            <a:noAutofit/>
+          </a:bodyPr>
           <a:lstStyle xmlns:a="http://schemas.openxmlformats.org/drawingml/2006/main"/>
           <a:p xmlns:a="http://schemas.openxmlformats.org/drawingml/2006/main">
             <a:pPr>
-              <a:defRPr sz="1275" b="0">
+              <a:buNone/>
+              <a:defRPr sz="1200" b="0">
                 <a:solidFill>
                   <a:srgbClr val="50616B"/>
                 </a:solidFill>
+                <a:latin typeface="Arial"/>
+                <a:ea typeface="Arial"/>
+                <a:cs typeface="Arial"/>
               </a:defRPr>
             </a:pPr>
             <a:r>
-              <a:rPr sz="1275" b="0">
+              <a:rPr sz="1200" b="0">
                 <a:solidFill>
                   <a:srgbClr val="50616B"/>
                 </a:solidFill>
+                <a:latin typeface="Arial"/>
+                <a:ea typeface="Arial"/>
+                <a:cs typeface="Arial"/>
               </a:rPr>
               <a:t>AUTUMN 1  ·  WEEK 5  ·  LESSON B</a:t>
             </a:r>
@@ -6575,14 +7391,20 @@
           </a:ln>
         </p:spPr>
         <p:txBody>
-          <a:bodyPr xmlns:a="http://schemas.openxmlformats.org/drawingml/2006/main" lIns="0" tIns="0" rIns="0" bIns="0" anchor="ctr"/>
+          <a:bodyPr xmlns:a="http://schemas.openxmlformats.org/drawingml/2006/main" wrap="square" lIns="0" tIns="0" rIns="0" bIns="0" anchor="ctr">
+            <a:noAutofit/>
+          </a:bodyPr>
           <a:lstStyle xmlns:a="http://schemas.openxmlformats.org/drawingml/2006/main"/>
           <a:p xmlns:a="http://schemas.openxmlformats.org/drawingml/2006/main">
             <a:pPr>
+              <a:buNone/>
               <a:defRPr sz="1350" b="1">
                 <a:solidFill>
                   <a:srgbClr val="28685E"/>
                 </a:solidFill>
+                <a:latin typeface="Arial"/>
+                <a:ea typeface="Arial"/>
+                <a:cs typeface="Arial"/>
               </a:defRPr>
             </a:pPr>
             <a:r>
@@ -6590,6 +7412,9 @@
                 <a:solidFill>
                   <a:srgbClr val="28685E"/>
                 </a:solidFill>
+                <a:latin typeface="Arial"/>
+                <a:ea typeface="Arial"/>
+                <a:cs typeface="Arial"/>
               </a:rPr>
               <a:t>09</a:t>
             </a:r>
@@ -6612,8 +7437,8 @@
         </p:nvSpPr>
         <p:spPr>
           <a:xfrm xmlns:a="http://schemas.openxmlformats.org/drawingml/2006/main">
-            <a:off x="609600" y="2619375"/>
-            <a:ext cx="10972800" cy="714375"/>
+            <a:off x="609600" y="2305050"/>
+            <a:ext cx="10972800" cy="704850"/>
           </a:xfrm>
           <a:prstGeom xmlns:a="http://schemas.openxmlformats.org/drawingml/2006/main" prst="rect">
             <a:avLst/>
@@ -6625,14 +7450,20 @@
           </a:ln>
         </p:spPr>
         <p:txBody>
-          <a:bodyPr xmlns:a="http://schemas.openxmlformats.org/drawingml/2006/main" lIns="0" tIns="0" rIns="0" bIns="0" anchor="ctr"/>
+          <a:bodyPr xmlns:a="http://schemas.openxmlformats.org/drawingml/2006/main" wrap="square" lIns="0" tIns="0" rIns="0" bIns="0" anchor="ctr">
+            <a:noAutofit/>
+          </a:bodyPr>
           <a:lstStyle xmlns:a="http://schemas.openxmlformats.org/drawingml/2006/main"/>
           <a:p xmlns:a="http://schemas.openxmlformats.org/drawingml/2006/main">
             <a:pPr>
+              <a:buNone/>
               <a:defRPr sz="2550" b="0">
                 <a:solidFill>
                   <a:srgbClr val="152B3A"/>
                 </a:solidFill>
+                <a:latin typeface="Arial"/>
+                <a:ea typeface="Arial"/>
+                <a:cs typeface="Arial"/>
               </a:defRPr>
             </a:pPr>
             <a:r>
@@ -6640,6 +7471,9 @@
                 <a:solidFill>
                   <a:srgbClr val="152B3A"/>
                 </a:solidFill>
+                <a:latin typeface="Arial"/>
+                <a:ea typeface="Arial"/>
+                <a:cs typeface="Arial"/>
               </a:rPr>
               <a:t>What helped you join in?</a:t>
             </a:r>
@@ -6662,8 +7496,8 @@
         </p:nvSpPr>
         <p:spPr>
           <a:xfrm xmlns:a="http://schemas.openxmlformats.org/drawingml/2006/main">
-            <a:off x="609600" y="3409950"/>
-            <a:ext cx="10972800" cy="714375"/>
+            <a:off x="609600" y="3143250"/>
+            <a:ext cx="10972800" cy="704850"/>
           </a:xfrm>
           <a:prstGeom xmlns:a="http://schemas.openxmlformats.org/drawingml/2006/main" prst="rect">
             <a:avLst/>
@@ -6675,14 +7509,20 @@
           </a:ln>
         </p:spPr>
         <p:txBody>
-          <a:bodyPr xmlns:a="http://schemas.openxmlformats.org/drawingml/2006/main" lIns="0" tIns="0" rIns="0" bIns="0" anchor="ctr"/>
+          <a:bodyPr xmlns:a="http://schemas.openxmlformats.org/drawingml/2006/main" wrap="square" lIns="0" tIns="0" rIns="0" bIns="0" anchor="ctr">
+            <a:noAutofit/>
+          </a:bodyPr>
           <a:lstStyle xmlns:a="http://schemas.openxmlformats.org/drawingml/2006/main"/>
           <a:p xmlns:a="http://schemas.openxmlformats.org/drawingml/2006/main">
             <a:pPr>
+              <a:buNone/>
               <a:defRPr sz="2550" b="0">
                 <a:solidFill>
                   <a:srgbClr val="152B3A"/>
                 </a:solidFill>
+                <a:latin typeface="Arial"/>
+                <a:ea typeface="Arial"/>
+                <a:cs typeface="Arial"/>
               </a:defRPr>
             </a:pPr>
             <a:r>
@@ -6690,6 +7530,9 @@
                 <a:solidFill>
                   <a:srgbClr val="152B3A"/>
                 </a:solidFill>
+                <a:latin typeface="Arial"/>
+                <a:ea typeface="Arial"/>
+                <a:cs typeface="Arial"/>
               </a:rPr>
               <a:t>What could make the next activity easier?</a:t>
             </a:r>
@@ -6712,8 +7555,8 @@
         </p:nvSpPr>
         <p:spPr>
           <a:xfrm xmlns:a="http://schemas.openxmlformats.org/drawingml/2006/main">
-            <a:off x="609600" y="4200525"/>
-            <a:ext cx="10972800" cy="714375"/>
+            <a:off x="609600" y="3981450"/>
+            <a:ext cx="10972800" cy="704850"/>
           </a:xfrm>
           <a:prstGeom xmlns:a="http://schemas.openxmlformats.org/drawingml/2006/main" prst="rect">
             <a:avLst/>
@@ -6725,14 +7568,20 @@
           </a:ln>
         </p:spPr>
         <p:txBody>
-          <a:bodyPr xmlns:a="http://schemas.openxmlformats.org/drawingml/2006/main" lIns="0" tIns="0" rIns="0" bIns="0" anchor="ctr"/>
+          <a:bodyPr xmlns:a="http://schemas.openxmlformats.org/drawingml/2006/main" wrap="square" lIns="0" tIns="0" rIns="0" bIns="0" anchor="ctr">
+            <a:noAutofit/>
+          </a:bodyPr>
           <a:lstStyle xmlns:a="http://schemas.openxmlformats.org/drawingml/2006/main"/>
           <a:p xmlns:a="http://schemas.openxmlformats.org/drawingml/2006/main">
             <a:pPr>
+              <a:buNone/>
               <a:defRPr sz="2550" b="0">
                 <a:solidFill>
                   <a:srgbClr val="152B3A"/>
                 </a:solidFill>
+                <a:latin typeface="Arial"/>
+                <a:ea typeface="Arial"/>
+                <a:cs typeface="Arial"/>
               </a:defRPr>
             </a:pPr>
             <a:r>
@@ -6740,6 +7589,9 @@
                 <a:solidFill>
                   <a:srgbClr val="152B3A"/>
                 </a:solidFill>
+                <a:latin typeface="Arial"/>
+                <a:ea typeface="Arial"/>
+                <a:cs typeface="Arial"/>
               </a:rPr>
               <a:t>Point, sign, speak, write or pass privately.</a:t>
             </a:r>
@@ -6762,8 +7614,8 @@
         </p:nvSpPr>
         <p:spPr>
           <a:xfrm xmlns:a="http://schemas.openxmlformats.org/drawingml/2006/main">
-            <a:off x="609600" y="4991100"/>
-            <a:ext cx="10972800" cy="714375"/>
+            <a:off x="609600" y="4819650"/>
+            <a:ext cx="10972800" cy="704850"/>
           </a:xfrm>
           <a:prstGeom xmlns:a="http://schemas.openxmlformats.org/drawingml/2006/main" prst="rect">
             <a:avLst/>
@@ -6775,21 +7627,30 @@
           </a:ln>
         </p:spPr>
         <p:txBody>
-          <a:bodyPr xmlns:a="http://schemas.openxmlformats.org/drawingml/2006/main" lIns="0" tIns="0" rIns="0" bIns="0" anchor="ctr"/>
+          <a:bodyPr xmlns:a="http://schemas.openxmlformats.org/drawingml/2006/main" wrap="square" lIns="0" tIns="0" rIns="0" bIns="0" anchor="ctr">
+            <a:noAutofit/>
+          </a:bodyPr>
           <a:lstStyle xmlns:a="http://schemas.openxmlformats.org/drawingml/2006/main"/>
           <a:p xmlns:a="http://schemas.openxmlformats.org/drawingml/2006/main">
             <a:pPr>
-              <a:defRPr sz="2550" b="0">
-                <a:solidFill>
-                  <a:srgbClr val="152B3A"/>
-                </a:solidFill>
+              <a:buNone/>
+              <a:defRPr sz="2550" b="1">
+                <a:solidFill>
+                  <a:srgbClr val="28685E"/>
+                </a:solidFill>
+                <a:latin typeface="Arial"/>
+                <a:ea typeface="Arial"/>
+                <a:cs typeface="Arial"/>
               </a:defRPr>
             </a:pPr>
             <a:r>
-              <a:rPr sz="2550" b="0">
-                <a:solidFill>
-                  <a:srgbClr val="152B3A"/>
-                </a:solidFill>
+              <a:rPr sz="2550" b="1">
+                <a:solidFill>
+                  <a:srgbClr val="28685E"/>
+                </a:solidFill>
+                <a:latin typeface="Arial"/>
+                <a:ea typeface="Arial"/>
+                <a:cs typeface="Arial"/>
               </a:rPr>
               <a:t>Adult: agree one change and explain any limit.</a:t>
             </a:r>
